--- a/curso/pptx/S33.pptx
+++ b/curso/pptx/S33.pptx
@@ -22,6 +22,7 @@
     <p:sldId id="270" r:id="rId22"/>
     <p:sldId id="271" r:id="rId23"/>
     <p:sldId id="272" r:id="rId24"/>
+    <p:sldId id="273" r:id="rId25"/>
   </p:sldIdLst>
   <p:sldSz cx="12192000" cy="6858000" type="screen4x3"/>
   <p:notesSz cx="6858000" cy="9144000"/>
@@ -4137,7 +4138,7 @@
                 </a:solidFill>
                 <a:latin typeface="Fredoka"/>
               </a:rPr>
-              <a:t>Caso 1 · El corte de agua</a:t>
+              <a:t>Posverdad</a:t>
             </a:r>
           </a:p>
         </p:txBody>
@@ -4150,14 +4151,14 @@
         </p:nvSpPr>
         <p:spPr>
           <a:xfrm>
-            <a:off x="640000" y="1600000"/>
-            <a:ext cx="10912000" cy="1100000"/>
+            <a:off x="640000" y="1650000"/>
+            <a:ext cx="10912000" cy="1150000"/>
           </a:xfrm>
           <a:prstGeom prst="rect">
             <a:avLst/>
           </a:prstGeom>
           <a:solidFill>
-            <a:srgbClr val="FFFFFF"/>
+            <a:srgbClr val="EAF0F7"/>
           </a:solidFill>
           <a:ln>
             <a:noFill/>
@@ -4193,7 +4194,7 @@
         </p:nvSpPr>
         <p:spPr>
           <a:xfrm>
-            <a:off x="840000" y="1650000"/>
+            <a:off x="840000" y="1730000"/>
             <a:ext cx="10512000" cy="1000000"/>
           </a:xfrm>
           <a:prstGeom prst="rect">
@@ -4209,17 +4210,35 @@
           <a:p>
             <a:pPr>
               <a:spcAft>
-                <a:spcPts val="1170"/>
-              </a:spcAft>
-            </a:pPr>
-            <a:r>
-              <a:rPr sz="2600" b="1">
+                <a:spcPts val="1260"/>
+              </a:spcAft>
+            </a:pPr>
+            <a:r>
+              <a:rPr sz="2800" b="1">
                 <a:solidFill>
                   <a:srgbClr val="1F2A44"/>
                 </a:solidFill>
                 <a:latin typeface="Nunito Sans"/>
               </a:rPr>
-              <a:t>«¡Urgente! Mañana cortan el agua en todo Bilbao durante tres días. Reenvía a todos tus grupos.»</a:t>
+              <a:t>Hablamos de </a:t>
+            </a:r>
+            <a:r>
+              <a:rPr sz="2800" b="1">
+                <a:solidFill>
+                  <a:srgbClr val="1F2A44"/>
+                </a:solidFill>
+                <a:latin typeface="Nunito Sans"/>
+              </a:rPr>
+              <a:t>posverdad</a:t>
+            </a:r>
+            <a:r>
+              <a:rPr sz="2800" b="1">
+                <a:solidFill>
+                  <a:srgbClr val="1F2A44"/>
+                </a:solidFill>
+                <a:latin typeface="Nunito Sans"/>
+              </a:rPr>
+              <a:t> cuando la emoción y lo que ya creemos pesan más que los hechos.</a:t>
             </a:r>
           </a:p>
         </p:txBody>
@@ -4232,8 +4251,8 @@
         </p:nvSpPr>
         <p:spPr>
           <a:xfrm>
-            <a:off x="640000" y="2900000"/>
-            <a:ext cx="10912000" cy="3500000"/>
+            <a:off x="640000" y="3000000"/>
+            <a:ext cx="10912000" cy="3458000"/>
           </a:xfrm>
           <a:prstGeom prst="rect">
             <a:avLst/>
@@ -4248,101 +4267,94 @@
           <a:p>
             <a:pPr>
               <a:spcAft>
-                <a:spcPts val="1080"/>
-              </a:spcAft>
-            </a:pPr>
-            <a:r>
-              <a:rPr sz="2400" b="1">
+                <a:spcPts val="1260"/>
+              </a:spcAft>
+            </a:pPr>
+            <a:r>
+              <a:rPr sz="2800" b="1">
                 <a:solidFill>
                   <a:srgbClr val="E8793A"/>
                 </a:solidFill>
                 <a:latin typeface="Nunito Sans"/>
               </a:rPr>
-              <a:t>1. </a:t>
-            </a:r>
-            <a:r>
-              <a:rPr sz="2400" b="0">
+              <a:t>• </a:t>
+            </a:r>
+            <a:r>
+              <a:rPr sz="2800" b="0">
                 <a:solidFill>
                   <a:srgbClr val="1F2A44"/>
                 </a:solidFill>
                 <a:latin typeface="Nunito Sans"/>
               </a:rPr>
-              <a:t>Ingredientes: urgencia («¡Urgente!») y petición de reenviar.</a:t>
-            </a:r>
-          </a:p>
-          <a:p>
-            <a:pPr>
-              <a:spcAft>
-                <a:spcPts val="1080"/>
-              </a:spcAft>
-            </a:pPr>
-            <a:r>
-              <a:rPr sz="2400" b="1">
+              <a:t>Un bulo triunfa si nos </a:t>
+            </a:r>
+            <a:r>
+              <a:rPr sz="2800" b="1">
+                <a:solidFill>
+                  <a:srgbClr val="1F2A44"/>
+                </a:solidFill>
+                <a:latin typeface="Nunito Sans"/>
+              </a:rPr>
+              <a:t>emociona</a:t>
+            </a:r>
+            <a:r>
+              <a:rPr sz="2800" b="0">
+                <a:solidFill>
+                  <a:srgbClr val="1F2A44"/>
+                </a:solidFill>
+                <a:latin typeface="Nunito Sans"/>
+              </a:rPr>
+              <a:t> o nos da la razón</a:t>
+            </a:r>
+          </a:p>
+          <a:p>
+            <a:pPr>
+              <a:spcAft>
+                <a:spcPts val="1260"/>
+              </a:spcAft>
+            </a:pPr>
+            <a:r>
+              <a:rPr sz="2800" b="1">
                 <a:solidFill>
                   <a:srgbClr val="E8793A"/>
                 </a:solidFill>
                 <a:latin typeface="Nunito Sans"/>
               </a:rPr>
-              <a:t>2. </a:t>
-            </a:r>
-            <a:r>
-              <a:rPr sz="2400" b="0">
+              <a:t>• </a:t>
+            </a:r>
+            <a:r>
+              <a:rPr sz="2800" b="0">
                 <a:solidFill>
                   <a:srgbClr val="1F2A44"/>
                 </a:solidFill>
                 <a:latin typeface="Nunito Sans"/>
               </a:rPr>
-              <a:t>¿Quién lo dice? Nadie: no hay fuente.</a:t>
-            </a:r>
-          </a:p>
-          <a:p>
-            <a:pPr>
-              <a:spcAft>
-                <a:spcPts val="1080"/>
-              </a:spcAft>
-            </a:pPr>
-            <a:r>
-              <a:rPr sz="2400" b="1">
+              <a:t>Que un mensaje nos guste no lo hace verdadero</a:t>
+            </a:r>
+          </a:p>
+          <a:p>
+            <a:pPr>
+              <a:spcAft>
+                <a:spcPts val="1260"/>
+              </a:spcAft>
+            </a:pPr>
+            <a:r>
+              <a:rPr sz="2800" b="1">
                 <a:solidFill>
                   <a:srgbClr val="E8793A"/>
                 </a:solidFill>
                 <a:latin typeface="Nunito Sans"/>
               </a:rPr>
-              <a:t>3. </a:t>
-            </a:r>
-            <a:r>
-              <a:rPr sz="2400" b="0">
+              <a:t>• </a:t>
+            </a:r>
+            <a:r>
+              <a:rPr sz="2800" b="0">
                 <a:solidFill>
                   <a:srgbClr val="1F2A44"/>
                 </a:solidFill>
                 <a:latin typeface="Nunito Sans"/>
               </a:rPr>
-              <a:t>¿Dónde lo compruebo? En la web del Ayuntamiento o de la empresa del agua.</a:t>
-            </a:r>
-          </a:p>
-          <a:p>
-            <a:pPr>
-              <a:spcAft>
-                <a:spcPts val="1080"/>
-              </a:spcAft>
-            </a:pPr>
-            <a:r>
-              <a:rPr sz="2400" b="1">
-                <a:solidFill>
-                  <a:srgbClr val="E8793A"/>
-                </a:solidFill>
-                <a:latin typeface="Nunito Sans"/>
-              </a:rPr>
-              <a:t>4. </a:t>
-            </a:r>
-            <a:r>
-              <a:rPr sz="2400" b="0">
-                <a:solidFill>
-                  <a:srgbClr val="1F2A44"/>
-                </a:solidFill>
-                <a:latin typeface="Nunito Sans"/>
-              </a:rPr>
-              <a:t>Conclusión: tiene cara de bulo. No lo reenvío hasta comprobarlo.</a:t>
+              <a:t>Para pensar: si comparto un bulo sin saberlo, ¿tengo alguna responsabilidad?</a:t>
             </a:r>
           </a:p>
         </p:txBody>
@@ -4446,7 +4458,7 @@
                 </a:solidFill>
                 <a:latin typeface="Fredoka"/>
               </a:rPr>
-              <a:t>Caso 2 · El «amigo policía»</a:t>
+              <a:t>Caso 1 · El corte de agua</a:t>
             </a:r>
           </a:p>
         </p:txBody>
@@ -4528,7 +4540,7 @@
                 </a:solidFill>
                 <a:latin typeface="Nunito Sans"/>
               </a:rPr>
-              <a:t>Audio de WhatsApp: «Mi cuñado es policía y dice que están raptando a chicos en los centros comerciales de Bizkaia».</a:t>
+              <a:t>«¡Urgente! Mañana cortan el agua en todo Bilbao durante tres días. Reenvía a todos tus grupos.»</a:t>
             </a:r>
           </a:p>
         </p:txBody>
@@ -4576,7 +4588,7 @@
                 </a:solidFill>
                 <a:latin typeface="Nunito Sans"/>
               </a:rPr>
-              <a:t>Fuente vaga: un cuñado sin nombre.</a:t>
+              <a:t>Ingredientes: urgencia («¡Urgente!») y petición de reenviar.</a:t>
             </a:r>
           </a:p>
           <a:p>
@@ -4601,7 +4613,7 @@
                 </a:solidFill>
                 <a:latin typeface="Nunito Sans"/>
               </a:rPr>
-              <a:t>Emoción fuerte: miedo, mucho miedo.</a:t>
+              <a:t>¿Quién lo dice? Nadie: no hay fuente.</a:t>
             </a:r>
           </a:p>
           <a:p>
@@ -4626,7 +4638,7 @@
                 </a:solidFill>
                 <a:latin typeface="Nunito Sans"/>
               </a:rPr>
-              <a:t>¿Lo cuentan la policía o los medios serios? No.</a:t>
+              <a:t>¿Dónde lo compruebo? En la web del Ayuntamiento o de la empresa del agua.</a:t>
             </a:r>
           </a:p>
           <a:p>
@@ -4651,7 +4663,7 @@
                 </a:solidFill>
                 <a:latin typeface="Nunito Sans"/>
               </a:rPr>
-              <a:t>Conclusión: tiene todas las señales de un bulo. No lo reenvío; si me preocupa, se lo cuento a un adulto.</a:t>
+              <a:t>Conclusión: tiene cara de bulo. No lo reenvío hasta comprobarlo.</a:t>
             </a:r>
           </a:p>
         </p:txBody>
@@ -4755,7 +4767,7 @@
                 </a:solidFill>
                 <a:latin typeface="Fredoka"/>
               </a:rPr>
-              <a:t>Caso 3 · La foto de la inundación</a:t>
+              <a:t>Caso 2 · El «amigo policía»</a:t>
             </a:r>
           </a:p>
         </p:txBody>
@@ -4837,7 +4849,7 @@
                 </a:solidFill>
                 <a:latin typeface="Nunito Sans"/>
               </a:rPr>
-              <a:t>Una foto real de una calle inundada, con el texto «Bilbao, ayer». La foto es de otro país y de hace cinco años.</a:t>
+              <a:t>Audio de WhatsApp: «Mi cuñado es policía y dice que están raptando a chicos en los centros comerciales de Bizkaia».</a:t>
             </a:r>
           </a:p>
         </p:txBody>
@@ -4885,7 +4897,7 @@
                 </a:solidFill>
                 <a:latin typeface="Nunito Sans"/>
               </a:rPr>
-              <a:t>¿La foto es falsa? No: la inundación pasó de verdad.</a:t>
+              <a:t>Fuente vaga: un cuñado sin nombre.</a:t>
             </a:r>
           </a:p>
           <a:p>
@@ -4910,7 +4922,7 @@
                 </a:solidFill>
                 <a:latin typeface="Nunito Sans"/>
               </a:rPr>
-              <a:t>¿Qué es falso? El lugar y la fecha.</a:t>
+              <a:t>Emoción fuerte: miedo, mucho miedo.</a:t>
             </a:r>
           </a:p>
           <a:p>
@@ -4935,7 +4947,7 @@
                 </a:solidFill>
                 <a:latin typeface="Nunito Sans"/>
               </a:rPr>
-              <a:t>Es el bulo más fácil de fabricar: no hay que inventar la imagen.</a:t>
+              <a:t>¿Lo cuentan la policía o los medios serios? No.</a:t>
             </a:r>
           </a:p>
           <a:p>
@@ -4960,7 +4972,7 @@
                 </a:solidFill>
                 <a:latin typeface="Nunito Sans"/>
               </a:rPr>
-              <a:t>Conclusión: una foto verdadera con un contexto falso también es un bulo.</a:t>
+              <a:t>Conclusión: tiene todas las señales de un bulo. No lo reenvío; si me preocupa, se lo cuento a un adulto.</a:t>
             </a:r>
           </a:p>
         </p:txBody>
@@ -4974,6 +4986,315 @@
 </file>
 
 <file path=ppt/slides/slide13.xml><?xml version="1.0" encoding="utf-8"?>
+<p:sld xmlns:a="http://schemas.openxmlformats.org/drawingml/2006/main" xmlns:p="http://schemas.openxmlformats.org/presentationml/2006/main" xmlns:r="http://schemas.openxmlformats.org/officeDocument/2006/relationships">
+  <p:cSld>
+    <p:bg>
+      <p:bgPr>
+        <a:solidFill>
+          <a:srgbClr val="FBF7EF"/>
+        </a:solidFill>
+        <a:effectLst/>
+      </p:bgPr>
+    </p:bg>
+    <p:spTree>
+      <p:nvGrpSpPr>
+        <p:cNvPr id="1" name=""/>
+        <p:cNvGrpSpPr/>
+        <p:nvPr/>
+      </p:nvGrpSpPr>
+      <p:grpSpPr/>
+      <p:sp>
+        <p:nvSpPr>
+          <p:cNvPr id="2" name="TextBox 1"/>
+          <p:cNvSpPr txBox="1"/>
+          <p:nvPr/>
+        </p:nvSpPr>
+        <p:spPr>
+          <a:xfrm>
+            <a:off x="640000" y="380000"/>
+            <a:ext cx="10912000" cy="420000"/>
+          </a:xfrm>
+          <a:prstGeom prst="rect">
+            <a:avLst/>
+          </a:prstGeom>
+          <a:noFill/>
+        </p:spPr>
+        <p:txBody>
+          <a:bodyPr wrap="square">
+            <a:spAutoFit/>
+          </a:bodyPr>
+          <a:lstStyle/>
+          <a:p>
+            <a:pPr>
+              <a:spcAft>
+                <a:spcPts val="630"/>
+              </a:spcAft>
+            </a:pPr>
+            <a:r>
+              <a:rPr sz="1400" b="1">
+                <a:solidFill>
+                  <a:srgbClr val="E8793A"/>
+                </a:solidFill>
+                <a:latin typeface="Nunito Sans"/>
+              </a:rPr>
+              <a:t>BLOQUE 2 · POR QUÉ SE COMPARTEN</a:t>
+            </a:r>
+          </a:p>
+        </p:txBody>
+      </p:sp>
+      <p:sp>
+        <p:nvSpPr>
+          <p:cNvPr id="3" name="TextBox 2"/>
+          <p:cNvSpPr txBox="1"/>
+          <p:nvPr/>
+        </p:nvSpPr>
+        <p:spPr>
+          <a:xfrm>
+            <a:off x="640000" y="760000"/>
+            <a:ext cx="10912000" cy="800000"/>
+          </a:xfrm>
+          <a:prstGeom prst="rect">
+            <a:avLst/>
+          </a:prstGeom>
+          <a:noFill/>
+        </p:spPr>
+        <p:txBody>
+          <a:bodyPr wrap="square">
+            <a:spAutoFit/>
+          </a:bodyPr>
+          <a:lstStyle/>
+          <a:p>
+            <a:pPr>
+              <a:spcAft>
+                <a:spcPts val="1710"/>
+              </a:spcAft>
+            </a:pPr>
+            <a:r>
+              <a:rPr sz="3800" b="1">
+                <a:solidFill>
+                  <a:srgbClr val="1F2A44"/>
+                </a:solidFill>
+                <a:latin typeface="Fredoka"/>
+              </a:rPr>
+              <a:t>Caso 3 · La foto de la inundación</a:t>
+            </a:r>
+          </a:p>
+        </p:txBody>
+      </p:sp>
+      <p:sp>
+        <p:nvSpPr>
+          <p:cNvPr id="4" name="Rectangle 3"/>
+          <p:cNvSpPr/>
+          <p:nvPr/>
+        </p:nvSpPr>
+        <p:spPr>
+          <a:xfrm>
+            <a:off x="640000" y="1600000"/>
+            <a:ext cx="10912000" cy="1100000"/>
+          </a:xfrm>
+          <a:prstGeom prst="rect">
+            <a:avLst/>
+          </a:prstGeom>
+          <a:solidFill>
+            <a:srgbClr val="FFFFFF"/>
+          </a:solidFill>
+          <a:ln>
+            <a:noFill/>
+          </a:ln>
+        </p:spPr>
+        <p:style>
+          <a:lnRef idx="1">
+            <a:schemeClr val="accent1"/>
+          </a:lnRef>
+          <a:fillRef idx="3">
+            <a:schemeClr val="accent1"/>
+          </a:fillRef>
+          <a:effectRef idx="2">
+            <a:schemeClr val="accent1"/>
+          </a:effectRef>
+          <a:fontRef idx="minor">
+            <a:schemeClr val="lt1"/>
+          </a:fontRef>
+        </p:style>
+        <p:txBody>
+          <a:bodyPr rtlCol="0" anchor="ctr"/>
+          <a:lstStyle/>
+          <a:p>
+            <a:pPr algn="ctr"/>
+          </a:p>
+        </p:txBody>
+      </p:sp>
+      <p:sp>
+        <p:nvSpPr>
+          <p:cNvPr id="5" name="TextBox 4"/>
+          <p:cNvSpPr txBox="1"/>
+          <p:nvPr/>
+        </p:nvSpPr>
+        <p:spPr>
+          <a:xfrm>
+            <a:off x="840000" y="1650000"/>
+            <a:ext cx="10512000" cy="1000000"/>
+          </a:xfrm>
+          <a:prstGeom prst="rect">
+            <a:avLst/>
+          </a:prstGeom>
+          <a:noFill/>
+        </p:spPr>
+        <p:txBody>
+          <a:bodyPr wrap="square" anchor="ctr">
+            <a:spAutoFit/>
+          </a:bodyPr>
+          <a:lstStyle/>
+          <a:p>
+            <a:pPr>
+              <a:spcAft>
+                <a:spcPts val="1170"/>
+              </a:spcAft>
+            </a:pPr>
+            <a:r>
+              <a:rPr sz="2600" b="1">
+                <a:solidFill>
+                  <a:srgbClr val="1F2A44"/>
+                </a:solidFill>
+                <a:latin typeface="Nunito Sans"/>
+              </a:rPr>
+              <a:t>Una foto real de una calle inundada, con el texto «Bilbao, ayer». La foto es de otro país y de hace cinco años.</a:t>
+            </a:r>
+          </a:p>
+        </p:txBody>
+      </p:sp>
+      <p:sp>
+        <p:nvSpPr>
+          <p:cNvPr id="6" name="TextBox 5"/>
+          <p:cNvSpPr txBox="1"/>
+          <p:nvPr/>
+        </p:nvSpPr>
+        <p:spPr>
+          <a:xfrm>
+            <a:off x="640000" y="2900000"/>
+            <a:ext cx="10912000" cy="3500000"/>
+          </a:xfrm>
+          <a:prstGeom prst="rect">
+            <a:avLst/>
+          </a:prstGeom>
+          <a:noFill/>
+        </p:spPr>
+        <p:txBody>
+          <a:bodyPr wrap="square">
+            <a:spAutoFit/>
+          </a:bodyPr>
+          <a:lstStyle/>
+          <a:p>
+            <a:pPr>
+              <a:spcAft>
+                <a:spcPts val="1080"/>
+              </a:spcAft>
+            </a:pPr>
+            <a:r>
+              <a:rPr sz="2400" b="1">
+                <a:solidFill>
+                  <a:srgbClr val="E8793A"/>
+                </a:solidFill>
+                <a:latin typeface="Nunito Sans"/>
+              </a:rPr>
+              <a:t>1. </a:t>
+            </a:r>
+            <a:r>
+              <a:rPr sz="2400" b="0">
+                <a:solidFill>
+                  <a:srgbClr val="1F2A44"/>
+                </a:solidFill>
+                <a:latin typeface="Nunito Sans"/>
+              </a:rPr>
+              <a:t>¿La foto es falsa? No: la inundación pasó de verdad.</a:t>
+            </a:r>
+          </a:p>
+          <a:p>
+            <a:pPr>
+              <a:spcAft>
+                <a:spcPts val="1080"/>
+              </a:spcAft>
+            </a:pPr>
+            <a:r>
+              <a:rPr sz="2400" b="1">
+                <a:solidFill>
+                  <a:srgbClr val="E8793A"/>
+                </a:solidFill>
+                <a:latin typeface="Nunito Sans"/>
+              </a:rPr>
+              <a:t>2. </a:t>
+            </a:r>
+            <a:r>
+              <a:rPr sz="2400" b="0">
+                <a:solidFill>
+                  <a:srgbClr val="1F2A44"/>
+                </a:solidFill>
+                <a:latin typeface="Nunito Sans"/>
+              </a:rPr>
+              <a:t>¿Qué es falso? El lugar y la fecha.</a:t>
+            </a:r>
+          </a:p>
+          <a:p>
+            <a:pPr>
+              <a:spcAft>
+                <a:spcPts val="1080"/>
+              </a:spcAft>
+            </a:pPr>
+            <a:r>
+              <a:rPr sz="2400" b="1">
+                <a:solidFill>
+                  <a:srgbClr val="E8793A"/>
+                </a:solidFill>
+                <a:latin typeface="Nunito Sans"/>
+              </a:rPr>
+              <a:t>3. </a:t>
+            </a:r>
+            <a:r>
+              <a:rPr sz="2400" b="0">
+                <a:solidFill>
+                  <a:srgbClr val="1F2A44"/>
+                </a:solidFill>
+                <a:latin typeface="Nunito Sans"/>
+              </a:rPr>
+              <a:t>Es el bulo más fácil de fabricar: no hay que inventar la imagen.</a:t>
+            </a:r>
+          </a:p>
+          <a:p>
+            <a:pPr>
+              <a:spcAft>
+                <a:spcPts val="1080"/>
+              </a:spcAft>
+            </a:pPr>
+            <a:r>
+              <a:rPr sz="2400" b="1">
+                <a:solidFill>
+                  <a:srgbClr val="E8793A"/>
+                </a:solidFill>
+                <a:latin typeface="Nunito Sans"/>
+              </a:rPr>
+              <a:t>4. </a:t>
+            </a:r>
+            <a:r>
+              <a:rPr sz="2400" b="0">
+                <a:solidFill>
+                  <a:srgbClr val="1F2A44"/>
+                </a:solidFill>
+                <a:latin typeface="Nunito Sans"/>
+              </a:rPr>
+              <a:t>Conclusión: una foto verdadera con un contexto falso también es un bulo.</a:t>
+            </a:r>
+          </a:p>
+        </p:txBody>
+      </p:sp>
+    </p:spTree>
+  </p:cSld>
+  <p:clrMapOvr>
+    <a:masterClrMapping/>
+  </p:clrMapOvr>
+</p:sld>
+</file>
+
+<file path=ppt/slides/slide14.xml><?xml version="1.0" encoding="utf-8"?>
 <p:sld xmlns:a="http://schemas.openxmlformats.org/drawingml/2006/main" xmlns:p="http://schemas.openxmlformats.org/presentationml/2006/main" xmlns:r="http://schemas.openxmlformats.org/officeDocument/2006/relationships">
   <p:cSld>
     <p:bg>
@@ -5313,149 +5634,6 @@
                 <a:latin typeface="Nunito Sans"/>
               </a:rPr>
               <a:t>. Lo que decide es comprobar la fuente.</a:t>
-            </a:r>
-          </a:p>
-        </p:txBody>
-      </p:sp>
-    </p:spTree>
-  </p:cSld>
-  <p:clrMapOvr>
-    <a:masterClrMapping/>
-  </p:clrMapOvr>
-</p:sld>
-</file>
-
-<file path=ppt/slides/slide14.xml><?xml version="1.0" encoding="utf-8"?>
-<p:sld xmlns:a="http://schemas.openxmlformats.org/drawingml/2006/main" xmlns:p="http://schemas.openxmlformats.org/presentationml/2006/main" xmlns:r="http://schemas.openxmlformats.org/officeDocument/2006/relationships">
-  <p:cSld>
-    <p:bg>
-      <p:bgPr>
-        <a:solidFill>
-          <a:srgbClr val="FBF7EF"/>
-        </a:solidFill>
-        <a:effectLst/>
-      </p:bgPr>
-    </p:bg>
-    <p:spTree>
-      <p:nvGrpSpPr>
-        <p:cNvPr id="1" name=""/>
-        <p:cNvGrpSpPr/>
-        <p:nvPr/>
-      </p:nvGrpSpPr>
-      <p:grpSpPr/>
-      <p:sp>
-        <p:nvSpPr>
-          <p:cNvPr id="2" name="TextBox 1"/>
-          <p:cNvSpPr txBox="1"/>
-          <p:nvPr/>
-        </p:nvSpPr>
-        <p:spPr>
-          <a:xfrm>
-            <a:off x="640000" y="380000"/>
-            <a:ext cx="10912000" cy="420000"/>
-          </a:xfrm>
-          <a:prstGeom prst="rect">
-            <a:avLst/>
-          </a:prstGeom>
-          <a:noFill/>
-        </p:spPr>
-        <p:txBody>
-          <a:bodyPr wrap="square">
-            <a:spAutoFit/>
-          </a:bodyPr>
-          <a:lstStyle/>
-          <a:p>
-            <a:pPr>
-              <a:spcAft>
-                <a:spcPts val="630"/>
-              </a:spcAft>
-            </a:pPr>
-            <a:r>
-              <a:rPr sz="1400" b="1">
-                <a:solidFill>
-                  <a:srgbClr val="E8793A"/>
-                </a:solidFill>
-                <a:latin typeface="Nunito Sans"/>
-              </a:rPr>
-              <a:t>LO DE HOY EN TRES LÍNEAS</a:t>
-            </a:r>
-          </a:p>
-        </p:txBody>
-      </p:sp>
-      <p:sp>
-        <p:nvSpPr>
-          <p:cNvPr id="3" name="TextBox 2"/>
-          <p:cNvSpPr txBox="1"/>
-          <p:nvPr/>
-        </p:nvSpPr>
-        <p:spPr>
-          <a:xfrm>
-            <a:off x="640000" y="760000"/>
-            <a:ext cx="10912000" cy="800000"/>
-          </a:xfrm>
-          <a:prstGeom prst="rect">
-            <a:avLst/>
-          </a:prstGeom>
-          <a:noFill/>
-        </p:spPr>
-        <p:txBody>
-          <a:bodyPr wrap="square">
-            <a:spAutoFit/>
-          </a:bodyPr>
-          <a:lstStyle/>
-          <a:p>
-            <a:pPr>
-              <a:spcAft>
-                <a:spcPts val="1710"/>
-              </a:spcAft>
-            </a:pPr>
-            <a:r>
-              <a:rPr sz="3800" b="1">
-                <a:solidFill>
-                  <a:srgbClr val="1F2A44"/>
-                </a:solidFill>
-                <a:latin typeface="Fredoka"/>
-              </a:rPr>
-              <a:t>Escríbelo tú primero, sin mirar</a:t>
-            </a:r>
-          </a:p>
-        </p:txBody>
-      </p:sp>
-      <p:sp>
-        <p:nvSpPr>
-          <p:cNvPr id="4" name="TextBox 3"/>
-          <p:cNvSpPr txBox="1"/>
-          <p:nvPr/>
-        </p:nvSpPr>
-        <p:spPr>
-          <a:xfrm>
-            <a:off x="640000" y="1800000"/>
-            <a:ext cx="10912000" cy="1500000"/>
-          </a:xfrm>
-          <a:prstGeom prst="rect">
-            <a:avLst/>
-          </a:prstGeom>
-          <a:noFill/>
-        </p:spPr>
-        <p:txBody>
-          <a:bodyPr wrap="square">
-            <a:spAutoFit/>
-          </a:bodyPr>
-          <a:lstStyle/>
-          <a:p>
-            <a:pPr>
-              <a:spcAft>
-                <a:spcPts val="1170"/>
-              </a:spcAft>
-            </a:pPr>
-            <a:r>
-              <a:rPr sz="2600" b="0">
-                <a:solidFill>
-                  <a:srgbClr val="4A5568"/>
-                </a:solidFill>
-                <a:latin typeface="Nunito Sans"/>
-              </a:rPr>
-              <a:t>Dos minutos. Después lo comparamos.</a:t>
             </a:r>
           </a:p>
         </p:txBody>
@@ -5533,8 +5711,8 @@
         </p:nvSpPr>
         <p:spPr>
           <a:xfrm>
-            <a:off x="640000" y="1300000"/>
-            <a:ext cx="10912000" cy="4800000"/>
+            <a:off x="640000" y="760000"/>
+            <a:ext cx="10912000" cy="800000"/>
           </a:xfrm>
           <a:prstGeom prst="rect">
             <a:avLst/>
@@ -5549,76 +5727,56 @@
           <a:p>
             <a:pPr>
               <a:spcAft>
-                <a:spcPts val="1350"/>
-              </a:spcAft>
-            </a:pPr>
-            <a:r>
-              <a:rPr sz="3000" b="1">
-                <a:solidFill>
-                  <a:srgbClr val="E8793A"/>
-                </a:solidFill>
-                <a:latin typeface="Nunito Sans"/>
-              </a:rPr>
-              <a:t>1. </a:t>
-            </a:r>
-            <a:r>
-              <a:rPr sz="3000" b="0">
+                <a:spcPts val="1710"/>
+              </a:spcAft>
+            </a:pPr>
+            <a:r>
+              <a:rPr sz="3800" b="1">
                 <a:solidFill>
                   <a:srgbClr val="1F2A44"/>
                 </a:solidFill>
-                <a:latin typeface="Nunito Sans"/>
-              </a:rPr>
-              <a:t>Un bulo es una mentira inventada que se hace pasar por noticia.</a:t>
-            </a:r>
-          </a:p>
-          <a:p>
-            <a:pPr>
-              <a:spcAft>
-                <a:spcPts val="1350"/>
-              </a:spcAft>
-            </a:pPr>
-            <a:r>
-              <a:rPr sz="3000" b="1">
-                <a:solidFill>
-                  <a:srgbClr val="E8793A"/>
-                </a:solidFill>
-                <a:latin typeface="Nunito Sans"/>
-              </a:rPr>
-              <a:t>2. </a:t>
-            </a:r>
-            <a:r>
-              <a:rPr sz="3000" b="0">
-                <a:solidFill>
-                  <a:srgbClr val="1F2A44"/>
-                </a:solidFill>
-                <a:latin typeface="Nunito Sans"/>
-              </a:rPr>
-              <a:t>Sus señales: urgencia, emoción fuerte, fuente vaga y sin fechas; son pistas, no pruebas.</a:t>
-            </a:r>
-          </a:p>
-          <a:p>
-            <a:pPr>
-              <a:spcAft>
-                <a:spcPts val="1350"/>
-              </a:spcAft>
-            </a:pPr>
-            <a:r>
-              <a:rPr sz="3000" b="1">
-                <a:solidFill>
-                  <a:srgbClr val="E8793A"/>
-                </a:solidFill>
-                <a:latin typeface="Nunito Sans"/>
-              </a:rPr>
-              <a:t>3. </a:t>
-            </a:r>
-            <a:r>
-              <a:rPr sz="3000" b="0">
-                <a:solidFill>
-                  <a:srgbClr val="1F2A44"/>
-                </a:solidFill>
-                <a:latin typeface="Nunito Sans"/>
-              </a:rPr>
-              <a:t>Lo compartimos porque nos emociona: antes de reenviar, para y comprueba.</a:t>
+                <a:latin typeface="Fredoka"/>
+              </a:rPr>
+              <a:t>Escríbelo tú primero, sin mirar</a:t>
+            </a:r>
+          </a:p>
+        </p:txBody>
+      </p:sp>
+      <p:sp>
+        <p:nvSpPr>
+          <p:cNvPr id="4" name="TextBox 3"/>
+          <p:cNvSpPr txBox="1"/>
+          <p:nvPr/>
+        </p:nvSpPr>
+        <p:spPr>
+          <a:xfrm>
+            <a:off x="640000" y="1800000"/>
+            <a:ext cx="10912000" cy="1500000"/>
+          </a:xfrm>
+          <a:prstGeom prst="rect">
+            <a:avLst/>
+          </a:prstGeom>
+          <a:noFill/>
+        </p:spPr>
+        <p:txBody>
+          <a:bodyPr wrap="square">
+            <a:spAutoFit/>
+          </a:bodyPr>
+          <a:lstStyle/>
+          <a:p>
+            <a:pPr>
+              <a:spcAft>
+                <a:spcPts val="1170"/>
+              </a:spcAft>
+            </a:pPr>
+            <a:r>
+              <a:rPr sz="2600" b="0">
+                <a:solidFill>
+                  <a:srgbClr val="4A5568"/>
+                </a:solidFill>
+                <a:latin typeface="Nunito Sans"/>
+              </a:rPr>
+              <a:t>Dos minutos. Después lo comparamos.</a:t>
             </a:r>
           </a:p>
         </p:txBody>
@@ -5632,6 +5790,169 @@
 </file>
 
 <file path=ppt/slides/slide16.xml><?xml version="1.0" encoding="utf-8"?>
+<p:sld xmlns:a="http://schemas.openxmlformats.org/drawingml/2006/main" xmlns:p="http://schemas.openxmlformats.org/presentationml/2006/main" xmlns:r="http://schemas.openxmlformats.org/officeDocument/2006/relationships">
+  <p:cSld>
+    <p:bg>
+      <p:bgPr>
+        <a:solidFill>
+          <a:srgbClr val="FBF7EF"/>
+        </a:solidFill>
+        <a:effectLst/>
+      </p:bgPr>
+    </p:bg>
+    <p:spTree>
+      <p:nvGrpSpPr>
+        <p:cNvPr id="1" name=""/>
+        <p:cNvGrpSpPr/>
+        <p:nvPr/>
+      </p:nvGrpSpPr>
+      <p:grpSpPr/>
+      <p:sp>
+        <p:nvSpPr>
+          <p:cNvPr id="2" name="TextBox 1"/>
+          <p:cNvSpPr txBox="1"/>
+          <p:nvPr/>
+        </p:nvSpPr>
+        <p:spPr>
+          <a:xfrm>
+            <a:off x="640000" y="380000"/>
+            <a:ext cx="10912000" cy="420000"/>
+          </a:xfrm>
+          <a:prstGeom prst="rect">
+            <a:avLst/>
+          </a:prstGeom>
+          <a:noFill/>
+        </p:spPr>
+        <p:txBody>
+          <a:bodyPr wrap="square">
+            <a:spAutoFit/>
+          </a:bodyPr>
+          <a:lstStyle/>
+          <a:p>
+            <a:pPr>
+              <a:spcAft>
+                <a:spcPts val="630"/>
+              </a:spcAft>
+            </a:pPr>
+            <a:r>
+              <a:rPr sz="1400" b="1">
+                <a:solidFill>
+                  <a:srgbClr val="E8793A"/>
+                </a:solidFill>
+                <a:latin typeface="Nunito Sans"/>
+              </a:rPr>
+              <a:t>LO DE HOY EN TRES LÍNEAS</a:t>
+            </a:r>
+          </a:p>
+        </p:txBody>
+      </p:sp>
+      <p:sp>
+        <p:nvSpPr>
+          <p:cNvPr id="3" name="TextBox 2"/>
+          <p:cNvSpPr txBox="1"/>
+          <p:nvPr/>
+        </p:nvSpPr>
+        <p:spPr>
+          <a:xfrm>
+            <a:off x="640000" y="1300000"/>
+            <a:ext cx="10912000" cy="4800000"/>
+          </a:xfrm>
+          <a:prstGeom prst="rect">
+            <a:avLst/>
+          </a:prstGeom>
+          <a:noFill/>
+        </p:spPr>
+        <p:txBody>
+          <a:bodyPr wrap="square">
+            <a:spAutoFit/>
+          </a:bodyPr>
+          <a:lstStyle/>
+          <a:p>
+            <a:pPr>
+              <a:spcAft>
+                <a:spcPts val="1350"/>
+              </a:spcAft>
+            </a:pPr>
+            <a:r>
+              <a:rPr sz="3000" b="1">
+                <a:solidFill>
+                  <a:srgbClr val="E8793A"/>
+                </a:solidFill>
+                <a:latin typeface="Nunito Sans"/>
+              </a:rPr>
+              <a:t>1. </a:t>
+            </a:r>
+            <a:r>
+              <a:rPr sz="3000" b="0">
+                <a:solidFill>
+                  <a:srgbClr val="1F2A44"/>
+                </a:solidFill>
+                <a:latin typeface="Nunito Sans"/>
+              </a:rPr>
+              <a:t>Un bulo es una mentira inventada que se hace pasar por noticia.</a:t>
+            </a:r>
+          </a:p>
+          <a:p>
+            <a:pPr>
+              <a:spcAft>
+                <a:spcPts val="1350"/>
+              </a:spcAft>
+            </a:pPr>
+            <a:r>
+              <a:rPr sz="3000" b="1">
+                <a:solidFill>
+                  <a:srgbClr val="E8793A"/>
+                </a:solidFill>
+                <a:latin typeface="Nunito Sans"/>
+              </a:rPr>
+              <a:t>2. </a:t>
+            </a:r>
+            <a:r>
+              <a:rPr sz="3000" b="0">
+                <a:solidFill>
+                  <a:srgbClr val="1F2A44"/>
+                </a:solidFill>
+                <a:latin typeface="Nunito Sans"/>
+              </a:rPr>
+              <a:t>Sus señales: urgencia, emoción fuerte, fuente vaga y sin fechas; son pistas, no pruebas.</a:t>
+            </a:r>
+          </a:p>
+          <a:p>
+            <a:pPr>
+              <a:spcAft>
+                <a:spcPts val="1350"/>
+              </a:spcAft>
+            </a:pPr>
+            <a:r>
+              <a:rPr sz="3000" b="1">
+                <a:solidFill>
+                  <a:srgbClr val="E8793A"/>
+                </a:solidFill>
+                <a:latin typeface="Nunito Sans"/>
+              </a:rPr>
+              <a:t>3. </a:t>
+            </a:r>
+            <a:r>
+              <a:rPr sz="3000" b="0">
+                <a:solidFill>
+                  <a:srgbClr val="1F2A44"/>
+                </a:solidFill>
+                <a:latin typeface="Nunito Sans"/>
+              </a:rPr>
+              <a:t>Lo compartimos porque nos emociona: antes de reenviar, para y comprueba.</a:t>
+            </a:r>
+          </a:p>
+        </p:txBody>
+      </p:sp>
+    </p:spTree>
+  </p:cSld>
+  <p:clrMapOvr>
+    <a:masterClrMapping/>
+  </p:clrMapOvr>
+</p:sld>
+</file>
+
+<file path=ppt/slides/slide17.xml><?xml version="1.0" encoding="utf-8"?>
 <p:sld xmlns:a="http://schemas.openxmlformats.org/drawingml/2006/main" xmlns:p="http://schemas.openxmlformats.org/presentationml/2006/main" xmlns:r="http://schemas.openxmlformats.org/officeDocument/2006/relationships">
   <p:cSld>
     <p:bg>
@@ -5774,7 +6095,7 @@
 </p:sld>
 </file>
 
-<file path=ppt/slides/slide17.xml><?xml version="1.0" encoding="utf-8"?>
+<file path=ppt/slides/slide18.xml><?xml version="1.0" encoding="utf-8"?>
 <p:sld xmlns:a="http://schemas.openxmlformats.org/drawingml/2006/main" xmlns:p="http://schemas.openxmlformats.org/presentationml/2006/main" xmlns:r="http://schemas.openxmlformats.org/officeDocument/2006/relationships">
   <p:cSld>
     <p:bg>

--- a/curso/pptx/S33.pptx
+++ b/curso/pptx/S33.pptx
@@ -472,426 +472,6 @@
     </a:lvl9pPr>
   </p:notesStyle>
 </p:notesMaster>
-</file>
-
-<file path=ppt/notesSlides/notesSlide1.xml><?xml version="1.0" encoding="utf-8"?>
-<p:notes xmlns:a="http://schemas.openxmlformats.org/drawingml/2006/main" xmlns:p="http://schemas.openxmlformats.org/presentationml/2006/main" xmlns:r="http://schemas.openxmlformats.org/officeDocument/2006/relationships">
-  <p:cSld>
-    <p:spTree>
-      <p:nvGrpSpPr>
-        <p:cNvPr id="1" name=""/>
-        <p:cNvGrpSpPr/>
-        <p:nvPr/>
-      </p:nvGrpSpPr>
-      <p:grpSpPr>
-        <a:xfrm>
-          <a:off x="0" y="0"/>
-          <a:ext cx="0" cy="0"/>
-          <a:chOff x="0" y="0"/>
-          <a:chExt cx="0" cy="0"/>
-        </a:xfrm>
-      </p:grpSpPr>
-      <p:sp>
-        <p:nvSpPr>
-          <p:cNvPr id="2" name="Slide Image Placeholder 1"/>
-          <p:cNvSpPr>
-            <a:spLocks noGrp="1"/>
-          </p:cNvSpPr>
-          <p:nvPr>
-            <p:ph type="sldImg" idx="2"/>
-          </p:nvPr>
-        </p:nvSpPr>
-        <p:spPr/>
-      </p:sp>
-      <p:sp>
-        <p:nvSpPr>
-          <p:cNvPr id="3" name="Notes Placeholder 2"/>
-          <p:cNvSpPr>
-            <a:spLocks noGrp="1"/>
-          </p:cNvSpPr>
-          <p:nvPr>
-            <p:ph type="body" idx="3" sz="quarter"/>
-          </p:nvPr>
-        </p:nvSpPr>
-        <p:spPr/>
-        <p:txBody>
-          <a:bodyPr/>
-          <a:lstStyle/>
-          <a:p>
-            <a:r>
-              <a:t>3 minutos. Sin apuntes. Es para recordar, no cuenta para nota.</a:t>
-            </a:r>
-          </a:p>
-        </p:txBody>
-      </p:sp>
-      <p:sp>
-        <p:nvSpPr>
-          <p:cNvPr id="4" name="Slide Number Placeholder 3"/>
-          <p:cNvSpPr>
-            <a:spLocks noGrp="1"/>
-          </p:cNvSpPr>
-          <p:nvPr>
-            <p:ph type="sldNum" idx="5" sz="quarter"/>
-          </p:nvPr>
-        </p:nvSpPr>
-        <p:spPr/>
-      </p:sp>
-    </p:spTree>
-  </p:cSld>
-  <p:clrMapOvr>
-    <a:masterClrMapping/>
-  </p:clrMapOvr>
-</p:notes>
-</file>
-
-<file path=ppt/notesSlides/notesSlide2.xml><?xml version="1.0" encoding="utf-8"?>
-<p:notes xmlns:a="http://schemas.openxmlformats.org/drawingml/2006/main" xmlns:p="http://schemas.openxmlformats.org/presentationml/2006/main" xmlns:r="http://schemas.openxmlformats.org/officeDocument/2006/relationships">
-  <p:cSld>
-    <p:spTree>
-      <p:nvGrpSpPr>
-        <p:cNvPr id="1" name=""/>
-        <p:cNvGrpSpPr/>
-        <p:nvPr/>
-      </p:nvGrpSpPr>
-      <p:grpSpPr>
-        <a:xfrm>
-          <a:off x="0" y="0"/>
-          <a:ext cx="0" cy="0"/>
-          <a:chOff x="0" y="0"/>
-          <a:chExt cx="0" cy="0"/>
-        </a:xfrm>
-      </p:grpSpPr>
-      <p:sp>
-        <p:nvSpPr>
-          <p:cNvPr id="2" name="Slide Image Placeholder 1"/>
-          <p:cNvSpPr>
-            <a:spLocks noGrp="1"/>
-          </p:cNvSpPr>
-          <p:nvPr>
-            <p:ph type="sldImg" idx="2"/>
-          </p:nvPr>
-        </p:nvSpPr>
-        <p:spPr/>
-      </p:sp>
-      <p:sp>
-        <p:nvSpPr>
-          <p:cNvPr id="3" name="Notes Placeholder 2"/>
-          <p:cNvSpPr>
-            <a:spLocks noGrp="1"/>
-          </p:cNvSpPr>
-          <p:nvPr>
-            <p:ph type="body" idx="3" sz="quarter"/>
-          </p:nvPr>
-        </p:nvSpPr>
-        <p:spPr/>
-        <p:txBody>
-          <a:bodyPr/>
-          <a:lstStyle/>
-          <a:p>
-            <a:r>
-              <a:t>3 minutos. Sin apuntes. Es para recordar, no cuenta para nota.</a:t>
-            </a:r>
-          </a:p>
-        </p:txBody>
-      </p:sp>
-      <p:sp>
-        <p:nvSpPr>
-          <p:cNvPr id="4" name="Slide Number Placeholder 3"/>
-          <p:cNvSpPr>
-            <a:spLocks noGrp="1"/>
-          </p:cNvSpPr>
-          <p:nvPr>
-            <p:ph type="sldNum" idx="5" sz="quarter"/>
-          </p:nvPr>
-        </p:nvSpPr>
-        <p:spPr/>
-      </p:sp>
-    </p:spTree>
-  </p:cSld>
-  <p:clrMapOvr>
-    <a:masterClrMapping/>
-  </p:clrMapOvr>
-</p:notes>
-</file>
-
-<file path=ppt/notesSlides/notesSlide3.xml><?xml version="1.0" encoding="utf-8"?>
-<p:notes xmlns:a="http://schemas.openxmlformats.org/drawingml/2006/main" xmlns:p="http://schemas.openxmlformats.org/presentationml/2006/main" xmlns:r="http://schemas.openxmlformats.org/officeDocument/2006/relationships">
-  <p:cSld>
-    <p:spTree>
-      <p:nvGrpSpPr>
-        <p:cNvPr id="1" name=""/>
-        <p:cNvGrpSpPr/>
-        <p:nvPr/>
-      </p:nvGrpSpPr>
-      <p:grpSpPr>
-        <a:xfrm>
-          <a:off x="0" y="0"/>
-          <a:ext cx="0" cy="0"/>
-          <a:chOff x="0" y="0"/>
-          <a:chExt cx="0" cy="0"/>
-        </a:xfrm>
-      </p:grpSpPr>
-      <p:sp>
-        <p:nvSpPr>
-          <p:cNvPr id="2" name="Slide Image Placeholder 1"/>
-          <p:cNvSpPr>
-            <a:spLocks noGrp="1"/>
-          </p:cNvSpPr>
-          <p:nvPr>
-            <p:ph type="sldImg" idx="2"/>
-          </p:nvPr>
-        </p:nvSpPr>
-        <p:spPr/>
-      </p:sp>
-      <p:sp>
-        <p:nvSpPr>
-          <p:cNvPr id="3" name="Notes Placeholder 2"/>
-          <p:cNvSpPr>
-            <a:spLocks noGrp="1"/>
-          </p:cNvSpPr>
-          <p:nvPr>
-            <p:ph type="body" idx="3" sz="quarter"/>
-          </p:nvPr>
-        </p:nvSpPr>
-        <p:spPr/>
-        <p:txBody>
-          <a:bodyPr/>
-          <a:lstStyle/>
-          <a:p>
-            <a:r>
-              <a:t>Nadie tiene que contestar: solo pensarlo.</a:t>
-            </a:r>
-          </a:p>
-        </p:txBody>
-      </p:sp>
-      <p:sp>
-        <p:nvSpPr>
-          <p:cNvPr id="4" name="Slide Number Placeholder 3"/>
-          <p:cNvSpPr>
-            <a:spLocks noGrp="1"/>
-          </p:cNvSpPr>
-          <p:nvPr>
-            <p:ph type="sldNum" idx="5" sz="quarter"/>
-          </p:nvPr>
-        </p:nvSpPr>
-        <p:spPr/>
-      </p:sp>
-    </p:spTree>
-  </p:cSld>
-  <p:clrMapOvr>
-    <a:masterClrMapping/>
-  </p:clrMapOvr>
-</p:notes>
-</file>
-
-<file path=ppt/notesSlides/notesSlide4.xml><?xml version="1.0" encoding="utf-8"?>
-<p:notes xmlns:a="http://schemas.openxmlformats.org/drawingml/2006/main" xmlns:p="http://schemas.openxmlformats.org/presentationml/2006/main" xmlns:r="http://schemas.openxmlformats.org/officeDocument/2006/relationships">
-  <p:cSld>
-    <p:spTree>
-      <p:nvGrpSpPr>
-        <p:cNvPr id="1" name=""/>
-        <p:cNvGrpSpPr/>
-        <p:nvPr/>
-      </p:nvGrpSpPr>
-      <p:grpSpPr>
-        <a:xfrm>
-          <a:off x="0" y="0"/>
-          <a:ext cx="0" cy="0"/>
-          <a:chOff x="0" y="0"/>
-          <a:chExt cx="0" cy="0"/>
-        </a:xfrm>
-      </p:grpSpPr>
-      <p:sp>
-        <p:nvSpPr>
-          <p:cNvPr id="2" name="Slide Image Placeholder 1"/>
-          <p:cNvSpPr>
-            <a:spLocks noGrp="1"/>
-          </p:cNvSpPr>
-          <p:nvPr>
-            <p:ph type="sldImg" idx="2"/>
-          </p:nvPr>
-        </p:nvSpPr>
-        <p:spPr/>
-      </p:sp>
-      <p:sp>
-        <p:nvSpPr>
-          <p:cNvPr id="3" name="Notes Placeholder 2"/>
-          <p:cNvSpPr>
-            <a:spLocks noGrp="1"/>
-          </p:cNvSpPr>
-          <p:nvPr>
-            <p:ph type="body" idx="3" sz="quarter"/>
-          </p:nvPr>
-        </p:nvSpPr>
-        <p:spPr/>
-        <p:txBody>
-          <a:bodyPr/>
-          <a:lstStyle/>
-          <a:p>
-            <a:r>
-              <a:t>Dejar unos segundos para que piensen la respuesta fácil antes de enseñar los pasos.</a:t>
-            </a:r>
-          </a:p>
-        </p:txBody>
-      </p:sp>
-      <p:sp>
-        <p:nvSpPr>
-          <p:cNvPr id="4" name="Slide Number Placeholder 3"/>
-          <p:cNvSpPr>
-            <a:spLocks noGrp="1"/>
-          </p:cNvSpPr>
-          <p:nvPr>
-            <p:ph type="sldNum" idx="5" sz="quarter"/>
-          </p:nvPr>
-        </p:nvSpPr>
-        <p:spPr/>
-      </p:sp>
-    </p:spTree>
-  </p:cSld>
-  <p:clrMapOvr>
-    <a:masterClrMapping/>
-  </p:clrMapOvr>
-</p:notes>
-</file>
-
-<file path=ppt/notesSlides/notesSlide5.xml><?xml version="1.0" encoding="utf-8"?>
-<p:notes xmlns:a="http://schemas.openxmlformats.org/drawingml/2006/main" xmlns:p="http://schemas.openxmlformats.org/presentationml/2006/main" xmlns:r="http://schemas.openxmlformats.org/officeDocument/2006/relationships">
-  <p:cSld>
-    <p:spTree>
-      <p:nvGrpSpPr>
-        <p:cNvPr id="1" name=""/>
-        <p:cNvGrpSpPr/>
-        <p:nvPr/>
-      </p:nvGrpSpPr>
-      <p:grpSpPr>
-        <a:xfrm>
-          <a:off x="0" y="0"/>
-          <a:ext cx="0" cy="0"/>
-          <a:chOff x="0" y="0"/>
-          <a:chExt cx="0" cy="0"/>
-        </a:xfrm>
-      </p:grpSpPr>
-      <p:sp>
-        <p:nvSpPr>
-          <p:cNvPr id="2" name="Slide Image Placeholder 1"/>
-          <p:cNvSpPr>
-            <a:spLocks noGrp="1"/>
-          </p:cNvSpPr>
-          <p:nvPr>
-            <p:ph type="sldImg" idx="2"/>
-          </p:nvPr>
-        </p:nvSpPr>
-        <p:spPr/>
-      </p:sp>
-      <p:sp>
-        <p:nvSpPr>
-          <p:cNvPr id="3" name="Notes Placeholder 2"/>
-          <p:cNvSpPr>
-            <a:spLocks noGrp="1"/>
-          </p:cNvSpPr>
-          <p:nvPr>
-            <p:ph type="body" idx="3" sz="quarter"/>
-          </p:nvPr>
-        </p:nvSpPr>
-        <p:spPr/>
-        <p:txBody>
-          <a:bodyPr/>
-          <a:lstStyle/>
-          <a:p>
-            <a:r>
-              <a:t>Dejar 2 minutos para que lo escriban. La diapositiva siguiente muestra el resumen.</a:t>
-            </a:r>
-          </a:p>
-        </p:txBody>
-      </p:sp>
-      <p:sp>
-        <p:nvSpPr>
-          <p:cNvPr id="4" name="Slide Number Placeholder 3"/>
-          <p:cNvSpPr>
-            <a:spLocks noGrp="1"/>
-          </p:cNvSpPr>
-          <p:nvPr>
-            <p:ph type="sldNum" idx="5" sz="quarter"/>
-          </p:nvPr>
-        </p:nvSpPr>
-        <p:spPr/>
-      </p:sp>
-    </p:spTree>
-  </p:cSld>
-  <p:clrMapOvr>
-    <a:masterClrMapping/>
-  </p:clrMapOvr>
-</p:notes>
-</file>
-
-<file path=ppt/notesSlides/notesSlide6.xml><?xml version="1.0" encoding="utf-8"?>
-<p:notes xmlns:a="http://schemas.openxmlformats.org/drawingml/2006/main" xmlns:p="http://schemas.openxmlformats.org/presentationml/2006/main" xmlns:r="http://schemas.openxmlformats.org/officeDocument/2006/relationships">
-  <p:cSld>
-    <p:spTree>
-      <p:nvGrpSpPr>
-        <p:cNvPr id="1" name=""/>
-        <p:cNvGrpSpPr/>
-        <p:nvPr/>
-      </p:nvGrpSpPr>
-      <p:grpSpPr>
-        <a:xfrm>
-          <a:off x="0" y="0"/>
-          <a:ext cx="0" cy="0"/>
-          <a:chOff x="0" y="0"/>
-          <a:chExt cx="0" cy="0"/>
-        </a:xfrm>
-      </p:grpSpPr>
-      <p:sp>
-        <p:nvSpPr>
-          <p:cNvPr id="2" name="Slide Image Placeholder 1"/>
-          <p:cNvSpPr>
-            <a:spLocks noGrp="1"/>
-          </p:cNvSpPr>
-          <p:nvPr>
-            <p:ph type="sldImg" idx="2"/>
-          </p:nvPr>
-        </p:nvSpPr>
-        <p:spPr/>
-      </p:sp>
-      <p:sp>
-        <p:nvSpPr>
-          <p:cNvPr id="3" name="Notes Placeholder 2"/>
-          <p:cNvSpPr>
-            <a:spLocks noGrp="1"/>
-          </p:cNvSpPr>
-          <p:nvPr>
-            <p:ph type="body" idx="3" sz="quarter"/>
-          </p:nvPr>
-        </p:nvSpPr>
-        <p:spPr/>
-        <p:txBody>
-          <a:bodyPr/>
-          <a:lstStyle/>
-          <a:p>
-            <a:r>
-              <a:t>Buscar: «qué es un bulo» · «cómo se extienden los bulos en WhatsApp»</a:t>
-            </a:r>
-          </a:p>
-        </p:txBody>
-      </p:sp>
-      <p:sp>
-        <p:nvSpPr>
-          <p:cNvPr id="4" name="Slide Number Placeholder 3"/>
-          <p:cNvSpPr>
-            <a:spLocks noGrp="1"/>
-          </p:cNvSpPr>
-          <p:nvPr>
-            <p:ph type="sldNum" idx="5" sz="quarter"/>
-          </p:nvPr>
-        </p:nvSpPr>
-        <p:spPr/>
-      </p:sp>
-    </p:spTree>
-  </p:cSld>
-  <p:clrMapOvr>
-    <a:masterClrMapping/>
-  </p:clrMapOvr>
-</p:notes>
 </file>
 
 <file path=ppt/slideLayouts/slideLayout1.xml><?xml version="1.0" encoding="utf-8"?>

--- a/curso/pptx/S33.pptx
+++ b/curso/pptx/S33.pptx
@@ -22,7 +22,6 @@
     <p:sldId id="270" r:id="rId22"/>
     <p:sldId id="271" r:id="rId23"/>
     <p:sldId id="272" r:id="rId24"/>
-    <p:sldId id="273" r:id="rId25"/>
   </p:sldIdLst>
   <p:sldSz cx="12192000" cy="6858000" type="screen4x3"/>
   <p:notesSz cx="6858000" cy="9144000"/>
@@ -3575,7 +3574,7 @@
                 </a:solidFill>
                 <a:latin typeface="Fredoka"/>
               </a:rPr>
-              <a:t>Bulos</a:t>
+              <a:t>Titulares y clickbait</a:t>
             </a:r>
           </a:p>
         </p:txBody>
@@ -3614,7 +3613,7 @@
                 </a:solidFill>
                 <a:latin typeface="Nunito Sans"/>
               </a:rPr>
-              <a:t>Un bulo es una mentira que se hace pasar por noticia; alguien lo fabrica para engañar y lo compartimos porque nos emociona.</a:t>
+              <a:t>Un titular clickbait promete más de lo que cuenta la noticia para que hagas clic; por eso hay que leer la noticia entera.</a:t>
             </a:r>
           </a:p>
         </p:txBody>
@@ -3679,7 +3678,7 @@
                 </a:solidFill>
                 <a:latin typeface="Nunito Sans"/>
               </a:rPr>
-              <a:t>BLOQUE 2 · POR QUÉ SE COMPARTEN</a:t>
+              <a:t>BLOQUE 2 · CASOS RESUELTOS</a:t>
             </a:r>
           </a:p>
         </p:txBody>
@@ -3718,7 +3717,7 @@
                 </a:solidFill>
                 <a:latin typeface="Fredoka"/>
               </a:rPr>
-              <a:t>Posverdad</a:t>
+              <a:t>Caso 1 · El chocolate</a:t>
             </a:r>
           </a:p>
         </p:txBody>
@@ -3731,14 +3730,14 @@
         </p:nvSpPr>
         <p:spPr>
           <a:xfrm>
-            <a:off x="640000" y="1650000"/>
-            <a:ext cx="10912000" cy="1150000"/>
+            <a:off x="640000" y="1600000"/>
+            <a:ext cx="10912000" cy="1100000"/>
           </a:xfrm>
           <a:prstGeom prst="rect">
             <a:avLst/>
           </a:prstGeom>
           <a:solidFill>
-            <a:srgbClr val="EAF0F7"/>
+            <a:srgbClr val="FFFFFF"/>
           </a:solidFill>
           <a:ln>
             <a:noFill/>
@@ -3774,7 +3773,7 @@
         </p:nvSpPr>
         <p:spPr>
           <a:xfrm>
-            <a:off x="840000" y="1730000"/>
+            <a:off x="840000" y="1650000"/>
             <a:ext cx="10512000" cy="1000000"/>
           </a:xfrm>
           <a:prstGeom prst="rect">
@@ -3790,35 +3789,17 @@
           <a:p>
             <a:pPr>
               <a:spcAft>
-                <a:spcPts val="1260"/>
-              </a:spcAft>
-            </a:pPr>
-            <a:r>
-              <a:rPr sz="2800" b="1">
+                <a:spcPts val="1170"/>
+              </a:spcAft>
+            </a:pPr>
+            <a:r>
+              <a:rPr sz="2600" b="1">
                 <a:solidFill>
                   <a:srgbClr val="1F2A44"/>
                 </a:solidFill>
                 <a:latin typeface="Nunito Sans"/>
               </a:rPr>
-              <a:t>Hablamos de </a:t>
-            </a:r>
-            <a:r>
-              <a:rPr sz="2800" b="1">
-                <a:solidFill>
-                  <a:srgbClr val="1F2A44"/>
-                </a:solidFill>
-                <a:latin typeface="Nunito Sans"/>
-              </a:rPr>
-              <a:t>posverdad</a:t>
-            </a:r>
-            <a:r>
-              <a:rPr sz="2800" b="1">
-                <a:solidFill>
-                  <a:srgbClr val="1F2A44"/>
-                </a:solidFill>
-                <a:latin typeface="Nunito Sans"/>
-              </a:rPr>
-              <a:t> cuando la emoción y lo que ya creemos pesan más que los hechos.</a:t>
+              <a:t>Titular: «Un estudio demuestra que el chocolate hace adelgazar». La noticia: 16 personas, dos semanas, y lo pagó una empresa de chocolate (ejemplo inventado).</a:t>
             </a:r>
           </a:p>
         </p:txBody>
@@ -3831,8 +3812,8 @@
         </p:nvSpPr>
         <p:spPr>
           <a:xfrm>
-            <a:off x="640000" y="3000000"/>
-            <a:ext cx="10912000" cy="3458000"/>
+            <a:off x="640000" y="2900000"/>
+            <a:ext cx="10912000" cy="3500000"/>
           </a:xfrm>
           <a:prstGeom prst="rect">
             <a:avLst/>
@@ -3847,94 +3828,101 @@
           <a:p>
             <a:pPr>
               <a:spcAft>
-                <a:spcPts val="1260"/>
-              </a:spcAft>
-            </a:pPr>
-            <a:r>
-              <a:rPr sz="2800" b="1">
+                <a:spcPts val="1080"/>
+              </a:spcAft>
+            </a:pPr>
+            <a:r>
+              <a:rPr sz="2400" b="1">
                 <a:solidFill>
                   <a:srgbClr val="E8793A"/>
                 </a:solidFill>
                 <a:latin typeface="Nunito Sans"/>
               </a:rPr>
-              <a:t>• </a:t>
-            </a:r>
-            <a:r>
-              <a:rPr sz="2800" b="0">
+              <a:t>1. </a:t>
+            </a:r>
+            <a:r>
+              <a:rPr sz="2400" b="0">
                 <a:solidFill>
                   <a:srgbClr val="1F2A44"/>
                 </a:solidFill>
                 <a:latin typeface="Nunito Sans"/>
               </a:rPr>
-              <a:t>Un bulo triunfa si nos </a:t>
-            </a:r>
-            <a:r>
-              <a:rPr sz="2800" b="1">
+              <a:t>¿Qué promete el titular? Que está «demostrado» y que adelgazas.</a:t>
+            </a:r>
+          </a:p>
+          <a:p>
+            <a:pPr>
+              <a:spcAft>
+                <a:spcPts val="1080"/>
+              </a:spcAft>
+            </a:pPr>
+            <a:r>
+              <a:rPr sz="2400" b="1">
+                <a:solidFill>
+                  <a:srgbClr val="E8793A"/>
+                </a:solidFill>
+                <a:latin typeface="Nunito Sans"/>
+              </a:rPr>
+              <a:t>2. </a:t>
+            </a:r>
+            <a:r>
+              <a:rPr sz="2400" b="0">
                 <a:solidFill>
                   <a:srgbClr val="1F2A44"/>
                 </a:solidFill>
                 <a:latin typeface="Nunito Sans"/>
               </a:rPr>
-              <a:t>emociona</a:t>
-            </a:r>
-            <a:r>
-              <a:rPr sz="2800" b="0">
+              <a:t>¿Qué dice la noticia? Muy pocas personas, muy poco tiempo, y alguien con interés pagó el estudio.</a:t>
+            </a:r>
+          </a:p>
+          <a:p>
+            <a:pPr>
+              <a:spcAft>
+                <a:spcPts val="1080"/>
+              </a:spcAft>
+            </a:pPr>
+            <a:r>
+              <a:rPr sz="2400" b="1">
+                <a:solidFill>
+                  <a:srgbClr val="E8793A"/>
+                </a:solidFill>
+                <a:latin typeface="Nunito Sans"/>
+              </a:rPr>
+              <a:t>3. </a:t>
+            </a:r>
+            <a:r>
+              <a:rPr sz="2400" b="0">
                 <a:solidFill>
                   <a:srgbClr val="1F2A44"/>
                 </a:solidFill>
                 <a:latin typeface="Nunito Sans"/>
               </a:rPr>
-              <a:t> o nos da la razón</a:t>
-            </a:r>
-          </a:p>
-          <a:p>
-            <a:pPr>
-              <a:spcAft>
-                <a:spcPts val="1260"/>
-              </a:spcAft>
-            </a:pPr>
-            <a:r>
-              <a:rPr sz="2800" b="1">
+              <a:t>La distancia entre titular y noticia es enorme.</a:t>
+            </a:r>
+          </a:p>
+          <a:p>
+            <a:pPr>
+              <a:spcAft>
+                <a:spcPts val="1080"/>
+              </a:spcAft>
+            </a:pPr>
+            <a:r>
+              <a:rPr sz="2400" b="1">
                 <a:solidFill>
                   <a:srgbClr val="E8793A"/>
                 </a:solidFill>
                 <a:latin typeface="Nunito Sans"/>
               </a:rPr>
-              <a:t>• </a:t>
-            </a:r>
-            <a:r>
-              <a:rPr sz="2800" b="0">
+              <a:t>4. </a:t>
+            </a:r>
+            <a:r>
+              <a:rPr sz="2400" b="0">
                 <a:solidFill>
                   <a:srgbClr val="1F2A44"/>
                 </a:solidFill>
                 <a:latin typeface="Nunito Sans"/>
               </a:rPr>
-              <a:t>Que un mensaje nos guste no lo hace verdadero</a:t>
-            </a:r>
-          </a:p>
-          <a:p>
-            <a:pPr>
-              <a:spcAft>
-                <a:spcPts val="1260"/>
-              </a:spcAft>
-            </a:pPr>
-            <a:r>
-              <a:rPr sz="2800" b="1">
-                <a:solidFill>
-                  <a:srgbClr val="E8793A"/>
-                </a:solidFill>
-                <a:latin typeface="Nunito Sans"/>
-              </a:rPr>
-              <a:t>• </a:t>
-            </a:r>
-            <a:r>
-              <a:rPr sz="2800" b="0">
-                <a:solidFill>
-                  <a:srgbClr val="1F2A44"/>
-                </a:solidFill>
-                <a:latin typeface="Nunito Sans"/>
-              </a:rPr>
-              <a:t>Para pensar: si comparto un bulo sin saberlo, ¿tengo alguna responsabilidad?</a:t>
+              <a:t>Conclusión: titular engañoso. Con tan pocos datos, la noticia no demuestra nada.</a:t>
             </a:r>
           </a:p>
         </p:txBody>
@@ -3999,7 +3987,7 @@
                 </a:solidFill>
                 <a:latin typeface="Nunito Sans"/>
               </a:rPr>
-              <a:t>BLOQUE 2 · POR QUÉ SE COMPARTEN</a:t>
+              <a:t>BLOQUE 2 · CASOS RESUELTOS</a:t>
             </a:r>
           </a:p>
         </p:txBody>
@@ -4038,7 +4026,7 @@
                 </a:solidFill>
                 <a:latin typeface="Fredoka"/>
               </a:rPr>
-              <a:t>Caso 1 · El corte de agua</a:t>
+              <a:t>Caso 2 · La pregunta</a:t>
             </a:r>
           </a:p>
         </p:txBody>
@@ -4120,7 +4108,7 @@
                 </a:solidFill>
                 <a:latin typeface="Nunito Sans"/>
               </a:rPr>
-              <a:t>«¡Urgente! Mañana cortan el agua en todo Bilbao durante tres días. Reenvía a todos tus grupos.»</a:t>
+              <a:t>Titular: «¿Prohibirán los móviles en todos los institutos el mes que viene?». La noticia: un político lo ha propuesto y nadie lo ha aprobado.</a:t>
             </a:r>
           </a:p>
         </p:txBody>
@@ -4168,7 +4156,7 @@
                 </a:solidFill>
                 <a:latin typeface="Nunito Sans"/>
               </a:rPr>
-              <a:t>Ingredientes: urgencia («¡Urgente!») y petición de reenviar.</a:t>
+              <a:t>El titular hace una pregunta que da miedo o curiosidad.</a:t>
             </a:r>
           </a:p>
           <a:p>
@@ -4193,7 +4181,7 @@
                 </a:solidFill>
                 <a:latin typeface="Nunito Sans"/>
               </a:rPr>
-              <a:t>¿Quién lo dice? Nadie: no hay fuente.</a:t>
+              <a:t>La noticia contesta, en el fondo, que no: solo es una propuesta.</a:t>
             </a:r>
           </a:p>
           <a:p>
@@ -4218,7 +4206,7 @@
                 </a:solidFill>
                 <a:latin typeface="Nunito Sans"/>
               </a:rPr>
-              <a:t>¿Dónde lo compruebo? En la web del Ayuntamiento o de la empresa del agua.</a:t>
+              <a:t>Quien lee solo el titular puede creer que ya está decidido.</a:t>
             </a:r>
           </a:p>
           <a:p>
@@ -4243,7 +4231,7 @@
                 </a:solidFill>
                 <a:latin typeface="Nunito Sans"/>
               </a:rPr>
-              <a:t>Conclusión: tiene cara de bulo. No lo reenvío hasta comprobarlo.</a:t>
+              <a:t>Conclusión: clickbait con pregunta. La respuesta real es «no, de momento».</a:t>
             </a:r>
           </a:p>
         </p:txBody>
@@ -4308,7 +4296,7 @@
                 </a:solidFill>
                 <a:latin typeface="Nunito Sans"/>
               </a:rPr>
-              <a:t>BLOQUE 2 · POR QUÉ SE COMPARTEN</a:t>
+              <a:t>BLOQUE 2 · CASOS RESUELTOS</a:t>
             </a:r>
           </a:p>
         </p:txBody>
@@ -4347,7 +4335,7 @@
                 </a:solidFill>
                 <a:latin typeface="Fredoka"/>
               </a:rPr>
-              <a:t>Caso 2 · El «amigo policía»</a:t>
+              <a:t>Caso 3 · Un titular honesto</a:t>
             </a:r>
           </a:p>
         </p:txBody>
@@ -4429,7 +4417,7 @@
                 </a:solidFill>
                 <a:latin typeface="Nunito Sans"/>
               </a:rPr>
-              <a:t>Audio de WhatsApp: «Mi cuñado es policía y dice que están raptando a chicos en los centros comerciales de Bizkaia».</a:t>
+              <a:t>Titular: «Las bibliotecas de Bilbao abrirán hasta las diez en época de exámenes». La noticia da fechas y horarios (ejemplo inventado).</a:t>
             </a:r>
           </a:p>
         </p:txBody>
@@ -4477,7 +4465,7 @@
                 </a:solidFill>
                 <a:latin typeface="Nunito Sans"/>
               </a:rPr>
-              <a:t>Fuente vaga: un cuñado sin nombre.</a:t>
+              <a:t>¿Esconde algo? No: el dato está en el titular.</a:t>
             </a:r>
           </a:p>
           <a:p>
@@ -4502,7 +4490,7 @@
                 </a:solidFill>
                 <a:latin typeface="Nunito Sans"/>
               </a:rPr>
-              <a:t>Emoción fuerte: miedo, mucho miedo.</a:t>
+              <a:t>¿Exagera? No: no hay palabras como «increíble».</a:t>
             </a:r>
           </a:p>
           <a:p>
@@ -4527,7 +4515,7 @@
                 </a:solidFill>
                 <a:latin typeface="Nunito Sans"/>
               </a:rPr>
-              <a:t>¿Lo cuentan la policía o los medios serios? No.</a:t>
+              <a:t>¿Coincide con la noticia? Sí: la noticia lo amplía con detalles.</a:t>
             </a:r>
           </a:p>
           <a:p>
@@ -4552,7 +4540,7 @@
                 </a:solidFill>
                 <a:latin typeface="Nunito Sans"/>
               </a:rPr>
-              <a:t>Conclusión: tiene todas las señales de un bulo. No lo reenvío; si me preocupa, se lo cuento a un adulto.</a:t>
+              <a:t>Conclusión: no todo titular es clickbait. Este resume bien la noticia.</a:t>
             </a:r>
           </a:p>
         </p:txBody>
@@ -4566,6 +4554,340 @@
 </file>
 
 <file path=ppt/slides/slide13.xml><?xml version="1.0" encoding="utf-8"?>
+<p:sld xmlns:a="http://schemas.openxmlformats.org/drawingml/2006/main" xmlns:p="http://schemas.openxmlformats.org/presentationml/2006/main" xmlns:r="http://schemas.openxmlformats.org/officeDocument/2006/relationships">
+  <p:cSld>
+    <p:bg>
+      <p:bgPr>
+        <a:solidFill>
+          <a:srgbClr val="F6C9A8"/>
+        </a:solidFill>
+        <a:effectLst/>
+      </p:bgPr>
+    </p:bg>
+    <p:spTree>
+      <p:nvGrpSpPr>
+        <p:cNvPr id="1" name=""/>
+        <p:cNvGrpSpPr/>
+        <p:nvPr/>
+      </p:nvGrpSpPr>
+      <p:grpSpPr/>
+      <p:sp>
+        <p:nvSpPr>
+          <p:cNvPr id="2" name="TextBox 1"/>
+          <p:cNvSpPr txBox="1"/>
+          <p:nvPr/>
+        </p:nvSpPr>
+        <p:spPr>
+          <a:xfrm>
+            <a:off x="640000" y="380000"/>
+            <a:ext cx="10912000" cy="420000"/>
+          </a:xfrm>
+          <a:prstGeom prst="rect">
+            <a:avLst/>
+          </a:prstGeom>
+          <a:noFill/>
+        </p:spPr>
+        <p:txBody>
+          <a:bodyPr wrap="square">
+            <a:spAutoFit/>
+          </a:bodyPr>
+          <a:lstStyle/>
+          <a:p>
+            <a:pPr>
+              <a:spcAft>
+                <a:spcPts val="630"/>
+              </a:spcAft>
+            </a:pPr>
+            <a:r>
+              <a:rPr sz="1400" b="1">
+                <a:solidFill>
+                  <a:srgbClr val="1F2A44"/>
+                </a:solidFill>
+                <a:latin typeface="Nunito Sans"/>
+              </a:rPr>
+              <a:t>CASO TRAMPA · BLOQUE 2 · CASOS RESUELTOS</a:t>
+            </a:r>
+          </a:p>
+        </p:txBody>
+      </p:sp>
+      <p:sp>
+        <p:nvSpPr>
+          <p:cNvPr id="3" name="TextBox 2"/>
+          <p:cNvSpPr txBox="1"/>
+          <p:nvPr/>
+        </p:nvSpPr>
+        <p:spPr>
+          <a:xfrm>
+            <a:off x="640000" y="760000"/>
+            <a:ext cx="10912000" cy="800000"/>
+          </a:xfrm>
+          <a:prstGeom prst="rect">
+            <a:avLst/>
+          </a:prstGeom>
+          <a:noFill/>
+        </p:spPr>
+        <p:txBody>
+          <a:bodyPr wrap="square">
+            <a:spAutoFit/>
+          </a:bodyPr>
+          <a:lstStyle/>
+          <a:p>
+            <a:pPr>
+              <a:spcAft>
+                <a:spcPts val="1710"/>
+              </a:spcAft>
+            </a:pPr>
+            <a:r>
+              <a:rPr sz="3800" b="1">
+                <a:solidFill>
+                  <a:srgbClr val="1F2A44"/>
+                </a:solidFill>
+                <a:latin typeface="Fredoka"/>
+              </a:rPr>
+              <a:t>⚠ La remontada</a:t>
+            </a:r>
+          </a:p>
+        </p:txBody>
+      </p:sp>
+      <p:sp>
+        <p:nvSpPr>
+          <p:cNvPr id="4" name="Rectangle 3"/>
+          <p:cNvSpPr/>
+          <p:nvPr/>
+        </p:nvSpPr>
+        <p:spPr>
+          <a:xfrm>
+            <a:off x="640000" y="1600000"/>
+            <a:ext cx="10912000" cy="1100000"/>
+          </a:xfrm>
+          <a:prstGeom prst="rect">
+            <a:avLst/>
+          </a:prstGeom>
+          <a:solidFill>
+            <a:srgbClr val="FBF7EF"/>
+          </a:solidFill>
+          <a:ln>
+            <a:noFill/>
+          </a:ln>
+        </p:spPr>
+        <p:style>
+          <a:lnRef idx="1">
+            <a:schemeClr val="accent1"/>
+          </a:lnRef>
+          <a:fillRef idx="3">
+            <a:schemeClr val="accent1"/>
+          </a:fillRef>
+          <a:effectRef idx="2">
+            <a:schemeClr val="accent1"/>
+          </a:effectRef>
+          <a:fontRef idx="minor">
+            <a:schemeClr val="lt1"/>
+          </a:fontRef>
+        </p:style>
+        <p:txBody>
+          <a:bodyPr rtlCol="0" anchor="ctr"/>
+          <a:lstStyle/>
+          <a:p>
+            <a:pPr algn="ctr"/>
+          </a:p>
+        </p:txBody>
+      </p:sp>
+      <p:sp>
+        <p:nvSpPr>
+          <p:cNvPr id="5" name="TextBox 4"/>
+          <p:cNvSpPr txBox="1"/>
+          <p:nvPr/>
+        </p:nvSpPr>
+        <p:spPr>
+          <a:xfrm>
+            <a:off x="840000" y="1650000"/>
+            <a:ext cx="10512000" cy="1000000"/>
+          </a:xfrm>
+          <a:prstGeom prst="rect">
+            <a:avLst/>
+          </a:prstGeom>
+          <a:noFill/>
+        </p:spPr>
+        <p:txBody>
+          <a:bodyPr wrap="square" anchor="ctr">
+            <a:spAutoFit/>
+          </a:bodyPr>
+          <a:lstStyle/>
+          <a:p>
+            <a:pPr>
+              <a:spcAft>
+                <a:spcPts val="1170"/>
+              </a:spcAft>
+            </a:pPr>
+            <a:r>
+              <a:rPr sz="2600" b="1">
+                <a:solidFill>
+                  <a:srgbClr val="1F2A44"/>
+                </a:solidFill>
+                <a:latin typeface="Nunito Sans"/>
+              </a:rPr>
+              <a:t>Titular: «Increíble remontada: el Athletic gana 3-2 tras ir perdiendo 0-2 en el minuto 80». (Ejemplo inventado.)</a:t>
+            </a:r>
+          </a:p>
+        </p:txBody>
+      </p:sp>
+      <p:sp>
+        <p:nvSpPr>
+          <p:cNvPr id="6" name="TextBox 5"/>
+          <p:cNvSpPr txBox="1"/>
+          <p:nvPr/>
+        </p:nvSpPr>
+        <p:spPr>
+          <a:xfrm>
+            <a:off x="640000" y="2900000"/>
+            <a:ext cx="10912000" cy="3500000"/>
+          </a:xfrm>
+          <a:prstGeom prst="rect">
+            <a:avLst/>
+          </a:prstGeom>
+          <a:noFill/>
+        </p:spPr>
+        <p:txBody>
+          <a:bodyPr wrap="square">
+            <a:spAutoFit/>
+          </a:bodyPr>
+          <a:lstStyle/>
+          <a:p>
+            <a:pPr>
+              <a:spcAft>
+                <a:spcPts val="1080"/>
+              </a:spcAft>
+            </a:pPr>
+            <a:r>
+              <a:rPr sz="2400" b="1">
+                <a:solidFill>
+                  <a:srgbClr val="E8793A"/>
+                </a:solidFill>
+                <a:latin typeface="Nunito Sans"/>
+              </a:rPr>
+              <a:t>1. </a:t>
+            </a:r>
+            <a:r>
+              <a:rPr sz="2400" b="0">
+                <a:solidFill>
+                  <a:srgbClr val="1F2A44"/>
+                </a:solidFill>
+                <a:latin typeface="Nunito Sans"/>
+              </a:rPr>
+              <a:t>Dice «increíble». ¿Es clickbait?</a:t>
+            </a:r>
+          </a:p>
+          <a:p>
+            <a:pPr>
+              <a:spcAft>
+                <a:spcPts val="1080"/>
+              </a:spcAft>
+            </a:pPr>
+            <a:r>
+              <a:rPr sz="2400" b="1">
+                <a:solidFill>
+                  <a:srgbClr val="E8793A"/>
+                </a:solidFill>
+                <a:latin typeface="Nunito Sans"/>
+              </a:rPr>
+              <a:t>2. </a:t>
+            </a:r>
+            <a:r>
+              <a:rPr sz="2400" b="0">
+                <a:solidFill>
+                  <a:srgbClr val="1F2A44"/>
+                </a:solidFill>
+                <a:latin typeface="Nunito Sans"/>
+              </a:rPr>
+              <a:t>Tiene una palabra de la lista: «increíble».</a:t>
+            </a:r>
+          </a:p>
+          <a:p>
+            <a:pPr>
+              <a:spcAft>
+                <a:spcPts val="1080"/>
+              </a:spcAft>
+            </a:pPr>
+            <a:r>
+              <a:rPr sz="2400" b="1">
+                <a:solidFill>
+                  <a:srgbClr val="E8793A"/>
+                </a:solidFill>
+                <a:latin typeface="Nunito Sans"/>
+              </a:rPr>
+              <a:t>3. </a:t>
+            </a:r>
+            <a:r>
+              <a:rPr sz="2400" b="0">
+                <a:solidFill>
+                  <a:srgbClr val="1F2A44"/>
+                </a:solidFill>
+                <a:latin typeface="Nunito Sans"/>
+              </a:rPr>
+              <a:t>Pero ¿esconde el dato? No: da el resultado y cómo pasó.</a:t>
+            </a:r>
+          </a:p>
+          <a:p>
+            <a:pPr>
+              <a:spcAft>
+                <a:spcPts val="1080"/>
+              </a:spcAft>
+            </a:pPr>
+            <a:r>
+              <a:rPr sz="2400" b="1">
+                <a:solidFill>
+                  <a:srgbClr val="E8793A"/>
+                </a:solidFill>
+                <a:latin typeface="Nunito Sans"/>
+              </a:rPr>
+              <a:t>4. </a:t>
+            </a:r>
+            <a:r>
+              <a:rPr sz="2400" b="0">
+                <a:solidFill>
+                  <a:srgbClr val="1F2A44"/>
+                </a:solidFill>
+                <a:latin typeface="Nunito Sans"/>
+              </a:rPr>
+              <a:t>¿Exagera? Remontar dos goles en diez minutos es raro de verdad.</a:t>
+            </a:r>
+          </a:p>
+          <a:p>
+            <a:pPr>
+              <a:spcAft>
+                <a:spcPts val="1080"/>
+              </a:spcAft>
+            </a:pPr>
+            <a:r>
+              <a:rPr sz="2400" b="1">
+                <a:solidFill>
+                  <a:srgbClr val="E8793A"/>
+                </a:solidFill>
+                <a:latin typeface="Nunito Sans"/>
+              </a:rPr>
+              <a:t>5. </a:t>
+            </a:r>
+            <a:r>
+              <a:rPr sz="2400" b="0">
+                <a:solidFill>
+                  <a:srgbClr val="1F2A44"/>
+                </a:solidFill>
+                <a:latin typeface="Nunito Sans"/>
+              </a:rPr>
+              <a:t>Conclusión: una palabra llamativa no basta. Clickbait es prometer más de lo que la noticia da.</a:t>
+            </a:r>
+          </a:p>
+        </p:txBody>
+      </p:sp>
+    </p:spTree>
+  </p:cSld>
+  <p:clrMapOvr>
+    <a:masterClrMapping/>
+  </p:clrMapOvr>
+</p:sld>
+</file>
+
+<file path=ppt/slides/slide14.xml><?xml version="1.0" encoding="utf-8"?>
 <p:sld xmlns:a="http://schemas.openxmlformats.org/drawingml/2006/main" xmlns:p="http://schemas.openxmlformats.org/presentationml/2006/main" xmlns:r="http://schemas.openxmlformats.org/officeDocument/2006/relationships">
   <p:cSld>
     <p:bg>
@@ -4617,7 +4939,7 @@
                 </a:solidFill>
                 <a:latin typeface="Nunito Sans"/>
               </a:rPr>
-              <a:t>BLOQUE 2 · POR QUÉ SE COMPARTEN</a:t>
+              <a:t>LO DE HOY EN TRES LÍNEAS</a:t>
             </a:r>
           </a:p>
         </p:txBody>
@@ -4656,64 +4978,21 @@
                 </a:solidFill>
                 <a:latin typeface="Fredoka"/>
               </a:rPr>
-              <a:t>Caso 3 · La foto de la inundación</a:t>
-            </a:r>
-          </a:p>
-        </p:txBody>
-      </p:sp>
-      <p:sp>
-        <p:nvSpPr>
-          <p:cNvPr id="4" name="Rectangle 3"/>
-          <p:cNvSpPr/>
-          <p:nvPr/>
-        </p:nvSpPr>
-        <p:spPr>
-          <a:xfrm>
-            <a:off x="640000" y="1600000"/>
-            <a:ext cx="10912000" cy="1100000"/>
-          </a:xfrm>
-          <a:prstGeom prst="rect">
-            <a:avLst/>
-          </a:prstGeom>
-          <a:solidFill>
-            <a:srgbClr val="FFFFFF"/>
-          </a:solidFill>
-          <a:ln>
-            <a:noFill/>
-          </a:ln>
-        </p:spPr>
-        <p:style>
-          <a:lnRef idx="1">
-            <a:schemeClr val="accent1"/>
-          </a:lnRef>
-          <a:fillRef idx="3">
-            <a:schemeClr val="accent1"/>
-          </a:fillRef>
-          <a:effectRef idx="2">
-            <a:schemeClr val="accent1"/>
-          </a:effectRef>
-          <a:fontRef idx="minor">
-            <a:schemeClr val="lt1"/>
-          </a:fontRef>
-        </p:style>
-        <p:txBody>
-          <a:bodyPr rtlCol="0" anchor="ctr"/>
-          <a:lstStyle/>
-          <a:p>
-            <a:pPr algn="ctr"/>
-          </a:p>
-        </p:txBody>
-      </p:sp>
-      <p:sp>
-        <p:nvSpPr>
-          <p:cNvPr id="5" name="TextBox 4"/>
+              <a:t>Escríbelo tú primero, sin mirar</a:t>
+            </a:r>
+          </a:p>
+        </p:txBody>
+      </p:sp>
+      <p:sp>
+        <p:nvSpPr>
+          <p:cNvPr id="4" name="TextBox 3"/>
           <p:cNvSpPr txBox="1"/>
           <p:nvPr/>
         </p:nvSpPr>
         <p:spPr>
           <a:xfrm>
-            <a:off x="840000" y="1650000"/>
-            <a:ext cx="10512000" cy="1000000"/>
+            <a:off x="640000" y="1800000"/>
+            <a:ext cx="10912000" cy="1500000"/>
           </a:xfrm>
           <a:prstGeom prst="rect">
             <a:avLst/>
@@ -4721,45 +5000,6 @@
           <a:noFill/>
         </p:spPr>
         <p:txBody>
-          <a:bodyPr wrap="square" anchor="ctr">
-            <a:spAutoFit/>
-          </a:bodyPr>
-          <a:lstStyle/>
-          <a:p>
-            <a:pPr>
-              <a:spcAft>
-                <a:spcPts val="1170"/>
-              </a:spcAft>
-            </a:pPr>
-            <a:r>
-              <a:rPr sz="2600" b="1">
-                <a:solidFill>
-                  <a:srgbClr val="1F2A44"/>
-                </a:solidFill>
-                <a:latin typeface="Nunito Sans"/>
-              </a:rPr>
-              <a:t>Una foto real de una calle inundada, con el texto «Bilbao, ayer». La foto es de otro país y de hace cinco años.</a:t>
-            </a:r>
-          </a:p>
-        </p:txBody>
-      </p:sp>
-      <p:sp>
-        <p:nvSpPr>
-          <p:cNvPr id="6" name="TextBox 5"/>
-          <p:cNvSpPr txBox="1"/>
-          <p:nvPr/>
-        </p:nvSpPr>
-        <p:spPr>
-          <a:xfrm>
-            <a:off x="640000" y="2900000"/>
-            <a:ext cx="10912000" cy="3500000"/>
-          </a:xfrm>
-          <a:prstGeom prst="rect">
-            <a:avLst/>
-          </a:prstGeom>
-          <a:noFill/>
-        </p:spPr>
-        <p:txBody>
           <a:bodyPr wrap="square">
             <a:spAutoFit/>
           </a:bodyPr>
@@ -4767,453 +5007,17 @@
           <a:p>
             <a:pPr>
               <a:spcAft>
-                <a:spcPts val="1080"/>
-              </a:spcAft>
-            </a:pPr>
-            <a:r>
-              <a:rPr sz="2400" b="1">
-                <a:solidFill>
-                  <a:srgbClr val="E8793A"/>
-                </a:solidFill>
-                <a:latin typeface="Nunito Sans"/>
-              </a:rPr>
-              <a:t>1. </a:t>
-            </a:r>
-            <a:r>
-              <a:rPr sz="2400" b="0">
-                <a:solidFill>
-                  <a:srgbClr val="1F2A44"/>
-                </a:solidFill>
-                <a:latin typeface="Nunito Sans"/>
-              </a:rPr>
-              <a:t>¿La foto es falsa? No: la inundación pasó de verdad.</a:t>
-            </a:r>
-          </a:p>
-          <a:p>
-            <a:pPr>
-              <a:spcAft>
-                <a:spcPts val="1080"/>
-              </a:spcAft>
-            </a:pPr>
-            <a:r>
-              <a:rPr sz="2400" b="1">
-                <a:solidFill>
-                  <a:srgbClr val="E8793A"/>
-                </a:solidFill>
-                <a:latin typeface="Nunito Sans"/>
-              </a:rPr>
-              <a:t>2. </a:t>
-            </a:r>
-            <a:r>
-              <a:rPr sz="2400" b="0">
-                <a:solidFill>
-                  <a:srgbClr val="1F2A44"/>
-                </a:solidFill>
-                <a:latin typeface="Nunito Sans"/>
-              </a:rPr>
-              <a:t>¿Qué es falso? El lugar y la fecha.</a:t>
-            </a:r>
-          </a:p>
-          <a:p>
-            <a:pPr>
-              <a:spcAft>
-                <a:spcPts val="1080"/>
-              </a:spcAft>
-            </a:pPr>
-            <a:r>
-              <a:rPr sz="2400" b="1">
-                <a:solidFill>
-                  <a:srgbClr val="E8793A"/>
-                </a:solidFill>
-                <a:latin typeface="Nunito Sans"/>
-              </a:rPr>
-              <a:t>3. </a:t>
-            </a:r>
-            <a:r>
-              <a:rPr sz="2400" b="0">
-                <a:solidFill>
-                  <a:srgbClr val="1F2A44"/>
-                </a:solidFill>
-                <a:latin typeface="Nunito Sans"/>
-              </a:rPr>
-              <a:t>Es el bulo más fácil de fabricar: no hay que inventar la imagen.</a:t>
-            </a:r>
-          </a:p>
-          <a:p>
-            <a:pPr>
-              <a:spcAft>
-                <a:spcPts val="1080"/>
-              </a:spcAft>
-            </a:pPr>
-            <a:r>
-              <a:rPr sz="2400" b="1">
-                <a:solidFill>
-                  <a:srgbClr val="E8793A"/>
-                </a:solidFill>
-                <a:latin typeface="Nunito Sans"/>
-              </a:rPr>
-              <a:t>4. </a:t>
-            </a:r>
-            <a:r>
-              <a:rPr sz="2400" b="0">
-                <a:solidFill>
-                  <a:srgbClr val="1F2A44"/>
-                </a:solidFill>
-                <a:latin typeface="Nunito Sans"/>
-              </a:rPr>
-              <a:t>Conclusión: una foto verdadera con un contexto falso también es un bulo.</a:t>
-            </a:r>
-          </a:p>
-        </p:txBody>
-      </p:sp>
-    </p:spTree>
-  </p:cSld>
-  <p:clrMapOvr>
-    <a:masterClrMapping/>
-  </p:clrMapOvr>
-</p:sld>
-</file>
-
-<file path=ppt/slides/slide14.xml><?xml version="1.0" encoding="utf-8"?>
-<p:sld xmlns:a="http://schemas.openxmlformats.org/drawingml/2006/main" xmlns:p="http://schemas.openxmlformats.org/presentationml/2006/main" xmlns:r="http://schemas.openxmlformats.org/officeDocument/2006/relationships">
-  <p:cSld>
-    <p:bg>
-      <p:bgPr>
-        <a:solidFill>
-          <a:srgbClr val="F6C9A8"/>
-        </a:solidFill>
-        <a:effectLst/>
-      </p:bgPr>
-    </p:bg>
-    <p:spTree>
-      <p:nvGrpSpPr>
-        <p:cNvPr id="1" name=""/>
-        <p:cNvGrpSpPr/>
-        <p:nvPr/>
-      </p:nvGrpSpPr>
-      <p:grpSpPr/>
-      <p:sp>
-        <p:nvSpPr>
-          <p:cNvPr id="2" name="TextBox 1"/>
-          <p:cNvSpPr txBox="1"/>
-          <p:nvPr/>
-        </p:nvSpPr>
-        <p:spPr>
-          <a:xfrm>
-            <a:off x="640000" y="380000"/>
-            <a:ext cx="10912000" cy="420000"/>
-          </a:xfrm>
-          <a:prstGeom prst="rect">
-            <a:avLst/>
-          </a:prstGeom>
-          <a:noFill/>
-        </p:spPr>
-        <p:txBody>
-          <a:bodyPr wrap="square">
-            <a:spAutoFit/>
-          </a:bodyPr>
-          <a:lstStyle/>
-          <a:p>
-            <a:pPr>
-              <a:spcAft>
-                <a:spcPts val="630"/>
-              </a:spcAft>
-            </a:pPr>
-            <a:r>
-              <a:rPr sz="1400" b="1">
-                <a:solidFill>
-                  <a:srgbClr val="1F2A44"/>
-                </a:solidFill>
-                <a:latin typeface="Nunito Sans"/>
-              </a:rPr>
-              <a:t>CASO TRAMPA · BLOQUE 2 · POR QUÉ SE COMPARTEN</a:t>
-            </a:r>
-          </a:p>
-        </p:txBody>
-      </p:sp>
-      <p:sp>
-        <p:nvSpPr>
-          <p:cNvPr id="3" name="TextBox 2"/>
-          <p:cNvSpPr txBox="1"/>
-          <p:nvPr/>
-        </p:nvSpPr>
-        <p:spPr>
-          <a:xfrm>
-            <a:off x="640000" y="760000"/>
-            <a:ext cx="10912000" cy="800000"/>
-          </a:xfrm>
-          <a:prstGeom prst="rect">
-            <a:avLst/>
-          </a:prstGeom>
-          <a:noFill/>
-        </p:spPr>
-        <p:txBody>
-          <a:bodyPr wrap="square">
-            <a:spAutoFit/>
-          </a:bodyPr>
-          <a:lstStyle/>
-          <a:p>
-            <a:pPr>
-              <a:spcAft>
-                <a:spcPts val="1710"/>
-              </a:spcAft>
-            </a:pPr>
-            <a:r>
-              <a:rPr sz="3800" b="1">
-                <a:solidFill>
-                  <a:srgbClr val="1F2A44"/>
-                </a:solidFill>
-                <a:latin typeface="Fredoka"/>
-              </a:rPr>
-              <a:t>⚠ El aviso de emergencias</a:t>
-            </a:r>
-          </a:p>
-        </p:txBody>
-      </p:sp>
-      <p:sp>
-        <p:nvSpPr>
-          <p:cNvPr id="4" name="Rectangle 3"/>
-          <p:cNvSpPr/>
-          <p:nvPr/>
-        </p:nvSpPr>
-        <p:spPr>
-          <a:xfrm>
-            <a:off x="640000" y="1600000"/>
-            <a:ext cx="10912000" cy="1100000"/>
-          </a:xfrm>
-          <a:prstGeom prst="rect">
-            <a:avLst/>
-          </a:prstGeom>
-          <a:solidFill>
-            <a:srgbClr val="FBF7EF"/>
-          </a:solidFill>
-          <a:ln>
-            <a:noFill/>
-          </a:ln>
-        </p:spPr>
-        <p:style>
-          <a:lnRef idx="1">
-            <a:schemeClr val="accent1"/>
-          </a:lnRef>
-          <a:fillRef idx="3">
-            <a:schemeClr val="accent1"/>
-          </a:fillRef>
-          <a:effectRef idx="2">
-            <a:schemeClr val="accent1"/>
-          </a:effectRef>
-          <a:fontRef idx="minor">
-            <a:schemeClr val="lt1"/>
-          </a:fontRef>
-        </p:style>
-        <p:txBody>
-          <a:bodyPr rtlCol="0" anchor="ctr"/>
-          <a:lstStyle/>
-          <a:p>
-            <a:pPr algn="ctr"/>
-          </a:p>
-        </p:txBody>
-      </p:sp>
-      <p:sp>
-        <p:nvSpPr>
-          <p:cNvPr id="5" name="TextBox 4"/>
-          <p:cNvSpPr txBox="1"/>
-          <p:nvPr/>
-        </p:nvSpPr>
-        <p:spPr>
-          <a:xfrm>
-            <a:off x="840000" y="1650000"/>
-            <a:ext cx="10512000" cy="1000000"/>
-          </a:xfrm>
-          <a:prstGeom prst="rect">
-            <a:avLst/>
-          </a:prstGeom>
-          <a:noFill/>
-        </p:spPr>
-        <p:txBody>
-          <a:bodyPr wrap="square" anchor="ctr">
-            <a:spAutoFit/>
-          </a:bodyPr>
-          <a:lstStyle/>
-          <a:p>
-            <a:pPr>
-              <a:spcAft>
                 <a:spcPts val="1170"/>
               </a:spcAft>
             </a:pPr>
             <a:r>
-              <a:rPr sz="2600" b="1">
-                <a:solidFill>
-                  <a:srgbClr val="1F2A44"/>
-                </a:solidFill>
-                <a:latin typeface="Nunito Sans"/>
-              </a:rPr>
-              <a:t>Mensaje: «¡Alerta roja por lluvias! No bajes al garaje ni cojas el coche. Pásalo a tu familia». Lo firma el servicio oficial de emergencias. (Ejemplo inventado.)</a:t>
-            </a:r>
-          </a:p>
-        </p:txBody>
-      </p:sp>
-      <p:sp>
-        <p:nvSpPr>
-          <p:cNvPr id="6" name="TextBox 5"/>
-          <p:cNvSpPr txBox="1"/>
-          <p:nvPr/>
-        </p:nvSpPr>
-        <p:spPr>
-          <a:xfrm>
-            <a:off x="640000" y="2900000"/>
-            <a:ext cx="10912000" cy="3500000"/>
-          </a:xfrm>
-          <a:prstGeom prst="rect">
-            <a:avLst/>
-          </a:prstGeom>
-          <a:noFill/>
-        </p:spPr>
-        <p:txBody>
-          <a:bodyPr wrap="square">
-            <a:spAutoFit/>
-          </a:bodyPr>
-          <a:lstStyle/>
-          <a:p>
-            <a:pPr>
-              <a:spcAft>
-                <a:spcPts val="1080"/>
-              </a:spcAft>
-            </a:pPr>
-            <a:r>
-              <a:rPr sz="2400" b="1">
-                <a:solidFill>
-                  <a:srgbClr val="E8793A"/>
-                </a:solidFill>
-                <a:latin typeface="Nunito Sans"/>
-              </a:rPr>
-              <a:t>1. </a:t>
-            </a:r>
-            <a:r>
-              <a:rPr sz="2400" b="0">
-                <a:solidFill>
-                  <a:srgbClr val="1F2A44"/>
-                </a:solidFill>
-                <a:latin typeface="Nunito Sans"/>
-              </a:rPr>
-              <a:t>Urgencia, miedo y «pásalo»: ¿es un bulo?</a:t>
-            </a:r>
-          </a:p>
-          <a:p>
-            <a:pPr>
-              <a:spcAft>
-                <a:spcPts val="1080"/>
-              </a:spcAft>
-            </a:pPr>
-            <a:r>
-              <a:rPr sz="2400" b="1">
-                <a:solidFill>
-                  <a:srgbClr val="E8793A"/>
-                </a:solidFill>
-                <a:latin typeface="Nunito Sans"/>
-              </a:rPr>
-              <a:t>2. </a:t>
-            </a:r>
-            <a:r>
-              <a:rPr sz="2400" b="0">
-                <a:solidFill>
-                  <a:srgbClr val="1F2A44"/>
-                </a:solidFill>
-                <a:latin typeface="Nunito Sans"/>
-              </a:rPr>
-              <a:t>Tiene ingredientes de bulo: urgencia, miedo y petición de reenviar.</a:t>
-            </a:r>
-          </a:p>
-          <a:p>
-            <a:pPr>
-              <a:spcAft>
-                <a:spcPts val="1080"/>
-              </a:spcAft>
-            </a:pPr>
-            <a:r>
-              <a:rPr sz="2400" b="1">
-                <a:solidFill>
-                  <a:srgbClr val="E8793A"/>
-                </a:solidFill>
-                <a:latin typeface="Nunito Sans"/>
-              </a:rPr>
-              <a:t>3. </a:t>
-            </a:r>
-            <a:r>
-              <a:rPr sz="2400" b="0">
-                <a:solidFill>
-                  <a:srgbClr val="1F2A44"/>
-                </a:solidFill>
-                <a:latin typeface="Nunito Sans"/>
-              </a:rPr>
-              <a:t>Pero miro la fuente: sale en la web oficial de emergencias y en los medios serios.</a:t>
-            </a:r>
-          </a:p>
-          <a:p>
-            <a:pPr>
-              <a:spcAft>
-                <a:spcPts val="1080"/>
-              </a:spcAft>
-            </a:pPr>
-            <a:r>
-              <a:rPr sz="2400" b="1">
-                <a:solidFill>
-                  <a:srgbClr val="E8793A"/>
-                </a:solidFill>
-                <a:latin typeface="Nunito Sans"/>
-              </a:rPr>
-              <a:t>4. </a:t>
-            </a:r>
-            <a:r>
-              <a:rPr sz="2400" b="0">
-                <a:solidFill>
-                  <a:srgbClr val="1F2A44"/>
-                </a:solidFill>
-                <a:latin typeface="Nunito Sans"/>
-              </a:rPr>
-              <a:t>Los avisos de verdad también son urgentes: a veces hay prisa de verdad.</a:t>
-            </a:r>
-          </a:p>
-          <a:p>
-            <a:pPr>
-              <a:spcAft>
-                <a:spcPts val="1080"/>
-              </a:spcAft>
-            </a:pPr>
-            <a:r>
-              <a:rPr sz="2400" b="1">
-                <a:solidFill>
-                  <a:srgbClr val="E8793A"/>
-                </a:solidFill>
-                <a:latin typeface="Nunito Sans"/>
-              </a:rPr>
-              <a:t>5. </a:t>
-            </a:r>
-            <a:r>
-              <a:rPr sz="2400" b="0">
-                <a:solidFill>
-                  <a:srgbClr val="1F2A44"/>
-                </a:solidFill>
-                <a:latin typeface="Nunito Sans"/>
-              </a:rPr>
-              <a:t>Conclusión: los ingredientes son señales para sospechar, no </a:t>
-            </a:r>
-            <a:r>
-              <a:rPr sz="2400" b="1">
-                <a:solidFill>
-                  <a:srgbClr val="1F2A44"/>
-                </a:solidFill>
-                <a:latin typeface="Nunito Sans"/>
-              </a:rPr>
-              <a:t>pruebas</a:t>
-            </a:r>
-            <a:r>
-              <a:rPr sz="2400" b="0">
-                <a:solidFill>
-                  <a:srgbClr val="1F2A44"/>
-                </a:solidFill>
-                <a:latin typeface="Nunito Sans"/>
-              </a:rPr>
-              <a:t>. Lo que decide es comprobar la fuente.</a:t>
+              <a:rPr sz="2600" b="0">
+                <a:solidFill>
+                  <a:srgbClr val="4A5568"/>
+                </a:solidFill>
+                <a:latin typeface="Nunito Sans"/>
+              </a:rPr>
+              <a:t>Dos minutos. Después lo comparamos.</a:t>
             </a:r>
           </a:p>
         </p:txBody>
@@ -5291,8 +5095,8 @@
         </p:nvSpPr>
         <p:spPr>
           <a:xfrm>
-            <a:off x="640000" y="760000"/>
-            <a:ext cx="10912000" cy="800000"/>
+            <a:off x="640000" y="1300000"/>
+            <a:ext cx="10912000" cy="4800000"/>
           </a:xfrm>
           <a:prstGeom prst="rect">
             <a:avLst/>
@@ -5307,56 +5111,76 @@
           <a:p>
             <a:pPr>
               <a:spcAft>
-                <a:spcPts val="1710"/>
-              </a:spcAft>
-            </a:pPr>
-            <a:r>
-              <a:rPr sz="3800" b="1">
+                <a:spcPts val="1350"/>
+              </a:spcAft>
+            </a:pPr>
+            <a:r>
+              <a:rPr sz="3000" b="1">
+                <a:solidFill>
+                  <a:srgbClr val="E8793A"/>
+                </a:solidFill>
+                <a:latin typeface="Nunito Sans"/>
+              </a:rPr>
+              <a:t>1. </a:t>
+            </a:r>
+            <a:r>
+              <a:rPr sz="3000" b="0">
                 <a:solidFill>
                   <a:srgbClr val="1F2A44"/>
                 </a:solidFill>
-                <a:latin typeface="Fredoka"/>
-              </a:rPr>
-              <a:t>Escríbelo tú primero, sin mirar</a:t>
-            </a:r>
-          </a:p>
-        </p:txBody>
-      </p:sp>
-      <p:sp>
-        <p:nvSpPr>
-          <p:cNvPr id="4" name="TextBox 3"/>
-          <p:cNvSpPr txBox="1"/>
-          <p:nvPr/>
-        </p:nvSpPr>
-        <p:spPr>
-          <a:xfrm>
-            <a:off x="640000" y="1800000"/>
-            <a:ext cx="10912000" cy="1500000"/>
-          </a:xfrm>
-          <a:prstGeom prst="rect">
-            <a:avLst/>
-          </a:prstGeom>
-          <a:noFill/>
-        </p:spPr>
-        <p:txBody>
-          <a:bodyPr wrap="square">
-            <a:spAutoFit/>
-          </a:bodyPr>
-          <a:lstStyle/>
-          <a:p>
-            <a:pPr>
-              <a:spcAft>
-                <a:spcPts val="1170"/>
-              </a:spcAft>
-            </a:pPr>
-            <a:r>
-              <a:rPr sz="2600" b="0">
-                <a:solidFill>
-                  <a:srgbClr val="4A5568"/>
-                </a:solidFill>
-                <a:latin typeface="Nunito Sans"/>
-              </a:rPr>
-              <a:t>Dos minutos. Después lo comparamos.</a:t>
+                <a:latin typeface="Nunito Sans"/>
+              </a:rPr>
+              <a:t>El titular resume la noticia, pero mucha gente solo lee el titular.</a:t>
+            </a:r>
+          </a:p>
+          <a:p>
+            <a:pPr>
+              <a:spcAft>
+                <a:spcPts val="1350"/>
+              </a:spcAft>
+            </a:pPr>
+            <a:r>
+              <a:rPr sz="3000" b="1">
+                <a:solidFill>
+                  <a:srgbClr val="E8793A"/>
+                </a:solidFill>
+                <a:latin typeface="Nunito Sans"/>
+              </a:rPr>
+              <a:t>2. </a:t>
+            </a:r>
+            <a:r>
+              <a:rPr sz="3000" b="0">
+                <a:solidFill>
+                  <a:srgbClr val="1F2A44"/>
+                </a:solidFill>
+                <a:latin typeface="Nunito Sans"/>
+              </a:rPr>
+              <a:t>El clickbait exagera o esconde información para que hagas clic.</a:t>
+            </a:r>
+          </a:p>
+          <a:p>
+            <a:pPr>
+              <a:spcAft>
+                <a:spcPts val="1350"/>
+              </a:spcAft>
+            </a:pPr>
+            <a:r>
+              <a:rPr sz="3000" b="1">
+                <a:solidFill>
+                  <a:srgbClr val="E8793A"/>
+                </a:solidFill>
+                <a:latin typeface="Nunito Sans"/>
+              </a:rPr>
+              <a:t>3. </a:t>
+            </a:r>
+            <a:r>
+              <a:rPr sz="3000" b="0">
+                <a:solidFill>
+                  <a:srgbClr val="1F2A44"/>
+                </a:solidFill>
+                <a:latin typeface="Nunito Sans"/>
+              </a:rPr>
+              <a:t>Un titular llamativo no siempre es clickbait: compara lo que promete con la noticia entera.</a:t>
             </a:r>
           </a:p>
         </p:txBody>
@@ -5375,7 +5199,7 @@
     <p:bg>
       <p:bgPr>
         <a:solidFill>
-          <a:srgbClr val="FBF7EF"/>
+          <a:srgbClr val="1F2A44"/>
         </a:solidFill>
         <a:effectLst/>
       </p:bgPr>
@@ -5417,11 +5241,11 @@
             <a:r>
               <a:rPr sz="1400" b="1">
                 <a:solidFill>
-                  <a:srgbClr val="E8793A"/>
-                </a:solidFill>
-                <a:latin typeface="Nunito Sans"/>
-              </a:rPr>
-              <a:t>LO DE HOY EN TRES LÍNEAS</a:t>
+                  <a:srgbClr val="F4B183"/>
+                </a:solidFill>
+                <a:latin typeface="Nunito Sans"/>
+              </a:rPr>
+              <a:t>VÍDEO</a:t>
             </a:r>
           </a:p>
         </p:txBody>
@@ -5434,8 +5258,8 @@
         </p:nvSpPr>
         <p:spPr>
           <a:xfrm>
-            <a:off x="640000" y="1300000"/>
-            <a:ext cx="10912000" cy="4800000"/>
+            <a:off x="640000" y="760000"/>
+            <a:ext cx="10912000" cy="800000"/>
           </a:xfrm>
           <a:prstGeom prst="rect">
             <a:avLst/>
@@ -5450,76 +5274,56 @@
           <a:p>
             <a:pPr>
               <a:spcAft>
-                <a:spcPts val="1350"/>
-              </a:spcAft>
-            </a:pPr>
-            <a:r>
-              <a:rPr sz="3000" b="1">
-                <a:solidFill>
-                  <a:srgbClr val="E8793A"/>
-                </a:solidFill>
-                <a:latin typeface="Nunito Sans"/>
-              </a:rPr>
-              <a:t>1. </a:t>
-            </a:r>
-            <a:r>
-              <a:rPr sz="3000" b="0">
-                <a:solidFill>
-                  <a:srgbClr val="1F2A44"/>
-                </a:solidFill>
-                <a:latin typeface="Nunito Sans"/>
-              </a:rPr>
-              <a:t>Un bulo es una mentira inventada que se hace pasar por noticia.</a:t>
-            </a:r>
-          </a:p>
-          <a:p>
-            <a:pPr>
-              <a:spcAft>
-                <a:spcPts val="1350"/>
-              </a:spcAft>
-            </a:pPr>
-            <a:r>
-              <a:rPr sz="3000" b="1">
-                <a:solidFill>
-                  <a:srgbClr val="E8793A"/>
-                </a:solidFill>
-                <a:latin typeface="Nunito Sans"/>
-              </a:rPr>
-              <a:t>2. </a:t>
-            </a:r>
-            <a:r>
-              <a:rPr sz="3000" b="0">
-                <a:solidFill>
-                  <a:srgbClr val="1F2A44"/>
-                </a:solidFill>
-                <a:latin typeface="Nunito Sans"/>
-              </a:rPr>
-              <a:t>Sus señales: urgencia, emoción fuerte, fuente vaga y sin fechas; son pistas, no pruebas.</a:t>
-            </a:r>
-          </a:p>
-          <a:p>
-            <a:pPr>
-              <a:spcAft>
-                <a:spcPts val="1350"/>
-              </a:spcAft>
-            </a:pPr>
-            <a:r>
-              <a:rPr sz="3000" b="1">
-                <a:solidFill>
-                  <a:srgbClr val="E8793A"/>
-                </a:solidFill>
-                <a:latin typeface="Nunito Sans"/>
-              </a:rPr>
-              <a:t>3. </a:t>
-            </a:r>
-            <a:r>
-              <a:rPr sz="3000" b="0">
-                <a:solidFill>
-                  <a:srgbClr val="1F2A44"/>
-                </a:solidFill>
-                <a:latin typeface="Nunito Sans"/>
-              </a:rPr>
-              <a:t>Lo compartimos porque nos emociona: antes de reenviar, para y comprueba.</a:t>
+                <a:spcPts val="1620"/>
+              </a:spcAft>
+            </a:pPr>
+            <a:r>
+              <a:rPr sz="3600" b="1">
+                <a:solidFill>
+                  <a:srgbClr val="FBF7EF"/>
+                </a:solidFill>
+                <a:latin typeface="Fredoka"/>
+              </a:rPr>
+              <a:t>Qué es el clickbait y cómo reconocerlo</a:t>
+            </a:r>
+          </a:p>
+        </p:txBody>
+      </p:sp>
+      <p:sp>
+        <p:nvSpPr>
+          <p:cNvPr id="4" name="TextBox 3"/>
+          <p:cNvSpPr txBox="1"/>
+          <p:nvPr/>
+        </p:nvSpPr>
+        <p:spPr>
+          <a:xfrm>
+            <a:off x="640000" y="2200000"/>
+            <a:ext cx="10912000" cy="2000000"/>
+          </a:xfrm>
+          <a:prstGeom prst="rect">
+            <a:avLst/>
+          </a:prstGeom>
+          <a:noFill/>
+        </p:spPr>
+        <p:txBody>
+          <a:bodyPr wrap="square">
+            <a:spAutoFit/>
+          </a:bodyPr>
+          <a:lstStyle/>
+          <a:p>
+            <a:pPr>
+              <a:spcAft>
+                <a:spcPts val="1080"/>
+              </a:spcAft>
+            </a:pPr>
+            <a:r>
+              <a:rPr sz="2400" b="0">
+                <a:solidFill>
+                  <a:srgbClr val="C9D3E6"/>
+                </a:solidFill>
+                <a:latin typeface="Nunito Sans"/>
+              </a:rPr>
+              <a:t>Que vean titulares reales y comparen lo que prometen con lo que cuenta la noticia.</a:t>
             </a:r>
           </a:p>
         </p:txBody>
@@ -5584,149 +5388,6 @@
                 </a:solidFill>
                 <a:latin typeface="Nunito Sans"/>
               </a:rPr>
-              <a:t>VÍDEO</a:t>
-            </a:r>
-          </a:p>
-        </p:txBody>
-      </p:sp>
-      <p:sp>
-        <p:nvSpPr>
-          <p:cNvPr id="3" name="TextBox 2"/>
-          <p:cNvSpPr txBox="1"/>
-          <p:nvPr/>
-        </p:nvSpPr>
-        <p:spPr>
-          <a:xfrm>
-            <a:off x="640000" y="760000"/>
-            <a:ext cx="10912000" cy="800000"/>
-          </a:xfrm>
-          <a:prstGeom prst="rect">
-            <a:avLst/>
-          </a:prstGeom>
-          <a:noFill/>
-        </p:spPr>
-        <p:txBody>
-          <a:bodyPr wrap="square">
-            <a:spAutoFit/>
-          </a:bodyPr>
-          <a:lstStyle/>
-          <a:p>
-            <a:pPr>
-              <a:spcAft>
-                <a:spcPts val="1620"/>
-              </a:spcAft>
-            </a:pPr>
-            <a:r>
-              <a:rPr sz="3600" b="1">
-                <a:solidFill>
-                  <a:srgbClr val="FBF7EF"/>
-                </a:solidFill>
-                <a:latin typeface="Fredoka"/>
-              </a:rPr>
-              <a:t>Qué es un bulo y por qué se extiende tan rápido</a:t>
-            </a:r>
-          </a:p>
-        </p:txBody>
-      </p:sp>
-      <p:sp>
-        <p:nvSpPr>
-          <p:cNvPr id="4" name="TextBox 3"/>
-          <p:cNvSpPr txBox="1"/>
-          <p:nvPr/>
-        </p:nvSpPr>
-        <p:spPr>
-          <a:xfrm>
-            <a:off x="640000" y="2200000"/>
-            <a:ext cx="10912000" cy="2000000"/>
-          </a:xfrm>
-          <a:prstGeom prst="rect">
-            <a:avLst/>
-          </a:prstGeom>
-          <a:noFill/>
-        </p:spPr>
-        <p:txBody>
-          <a:bodyPr wrap="square">
-            <a:spAutoFit/>
-          </a:bodyPr>
-          <a:lstStyle/>
-          <a:p>
-            <a:pPr>
-              <a:spcAft>
-                <a:spcPts val="1080"/>
-              </a:spcAft>
-            </a:pPr>
-            <a:r>
-              <a:rPr sz="2400" b="0">
-                <a:solidFill>
-                  <a:srgbClr val="C9D3E6"/>
-                </a:solidFill>
-                <a:latin typeface="Nunito Sans"/>
-              </a:rPr>
-              <a:t>Que vean ejemplos reales de bulos y los ingredientes que los hacen tan fáciles de compartir.</a:t>
-            </a:r>
-          </a:p>
-        </p:txBody>
-      </p:sp>
-    </p:spTree>
-  </p:cSld>
-  <p:clrMapOvr>
-    <a:masterClrMapping/>
-  </p:clrMapOvr>
-</p:sld>
-</file>
-
-<file path=ppt/slides/slide18.xml><?xml version="1.0" encoding="utf-8"?>
-<p:sld xmlns:a="http://schemas.openxmlformats.org/drawingml/2006/main" xmlns:p="http://schemas.openxmlformats.org/presentationml/2006/main" xmlns:r="http://schemas.openxmlformats.org/officeDocument/2006/relationships">
-  <p:cSld>
-    <p:bg>
-      <p:bgPr>
-        <a:solidFill>
-          <a:srgbClr val="1F2A44"/>
-        </a:solidFill>
-        <a:effectLst/>
-      </p:bgPr>
-    </p:bg>
-    <p:spTree>
-      <p:nvGrpSpPr>
-        <p:cNvPr id="1" name=""/>
-        <p:cNvGrpSpPr/>
-        <p:nvPr/>
-      </p:nvGrpSpPr>
-      <p:grpSpPr/>
-      <p:sp>
-        <p:nvSpPr>
-          <p:cNvPr id="2" name="TextBox 1"/>
-          <p:cNvSpPr txBox="1"/>
-          <p:nvPr/>
-        </p:nvSpPr>
-        <p:spPr>
-          <a:xfrm>
-            <a:off x="640000" y="380000"/>
-            <a:ext cx="10912000" cy="420000"/>
-          </a:xfrm>
-          <a:prstGeom prst="rect">
-            <a:avLst/>
-          </a:prstGeom>
-          <a:noFill/>
-        </p:spPr>
-        <p:txBody>
-          <a:bodyPr wrap="square">
-            <a:spAutoFit/>
-          </a:bodyPr>
-          <a:lstStyle/>
-          <a:p>
-            <a:pPr>
-              <a:spcAft>
-                <a:spcPts val="630"/>
-              </a:spcAft>
-            </a:pPr>
-            <a:r>
-              <a:rPr sz="1400" b="1">
-                <a:solidFill>
-                  <a:srgbClr val="F4B183"/>
-                </a:solidFill>
-                <a:latin typeface="Nunito Sans"/>
-              </a:rPr>
               <a:t>AHORA, LA HOJA DEL DÍA</a:t>
             </a:r>
           </a:p>
@@ -6320,7 +5981,7 @@
                 </a:solidFill>
                 <a:latin typeface="Nunito Sans"/>
               </a:rPr>
-              <a:t>Antes de creer o compartir un titular, lee la noticia ______.  (sesión 32)</a:t>
+              <a:t>La web de una marca que habla de su producto tiene un ______ claro: vender más.  (sesión 32)</a:t>
             </a:r>
           </a:p>
           <a:p>
@@ -6345,7 +6006,7 @@
                 </a:solidFill>
                 <a:latin typeface="Nunito Sans"/>
               </a:rPr>
-              <a:t>El clickbait exagera o ______ información para que hagas clic.  (sesión 32)</a:t>
+              <a:t>La fuente ______ es quien lo vio, lo midió o lo decidió.  (sesión 32)</a:t>
             </a:r>
           </a:p>
           <a:p>
@@ -6370,7 +6031,7 @@
                 </a:solidFill>
                 <a:latin typeface="Nunito Sans"/>
               </a:rPr>
-              <a:t>La pendiente resbaladiza empieza con algo pequeño y acaba en algo ______.  (sesión 21)</a:t>
+              <a:t>Pregunta que lo desmonta: ¿es eso ______ lo que he dicho?  (sesión 21)</a:t>
             </a:r>
           </a:p>
         </p:txBody>
@@ -6522,7 +6183,7 @@
                 </a:solidFill>
                 <a:latin typeface="Nunito Sans"/>
               </a:rPr>
-              <a:t>Antes de creer o compartir un titular, lee la noticia </a:t>
+              <a:t>La web de una marca que habla de su producto tiene un </a:t>
             </a:r>
             <a:r>
               <a:rPr sz="2600" b="1">
@@ -6531,7 +6192,7 @@
                 </a:solidFill>
                 <a:latin typeface="Nunito Sans"/>
               </a:rPr>
-              <a:t>entera</a:t>
+              <a:t>interés</a:t>
             </a:r>
             <a:r>
               <a:rPr sz="2600" b="0">
@@ -6540,7 +6201,7 @@
                 </a:solidFill>
                 <a:latin typeface="Nunito Sans"/>
               </a:rPr>
-              <a:t>.  (sesión 32)</a:t>
+              <a:t> claro: vender más.  (sesión 32)</a:t>
             </a:r>
           </a:p>
           <a:p>
@@ -6565,7 +6226,7 @@
                 </a:solidFill>
                 <a:latin typeface="Nunito Sans"/>
               </a:rPr>
-              <a:t>El clickbait exagera o </a:t>
+              <a:t>La fuente </a:t>
             </a:r>
             <a:r>
               <a:rPr sz="2600" b="1">
@@ -6574,7 +6235,7 @@
                 </a:solidFill>
                 <a:latin typeface="Nunito Sans"/>
               </a:rPr>
-              <a:t>esconde</a:t>
+              <a:t>original</a:t>
             </a:r>
             <a:r>
               <a:rPr sz="2600" b="0">
@@ -6583,7 +6244,7 @@
                 </a:solidFill>
                 <a:latin typeface="Nunito Sans"/>
               </a:rPr>
-              <a:t> información para que hagas clic.  (sesión 32)</a:t>
+              <a:t> es quien lo vio, lo midió o lo decidió.  (sesión 32)</a:t>
             </a:r>
           </a:p>
           <a:p>
@@ -6608,7 +6269,7 @@
                 </a:solidFill>
                 <a:latin typeface="Nunito Sans"/>
               </a:rPr>
-              <a:t>La pendiente resbaladiza empieza con algo pequeño y acaba en algo </a:t>
+              <a:t>Pregunta que lo desmonta: ¿es eso </a:t>
             </a:r>
             <a:r>
               <a:rPr sz="2600" b="1">
@@ -6617,7 +6278,7 @@
                 </a:solidFill>
                 <a:latin typeface="Nunito Sans"/>
               </a:rPr>
-              <a:t>terrible</a:t>
+              <a:t>exactamente</a:t>
             </a:r>
             <a:r>
               <a:rPr sz="2600" b="0">
@@ -6626,7 +6287,7 @@
                 </a:solidFill>
                 <a:latin typeface="Nunito Sans"/>
               </a:rPr>
-              <a:t>.  (sesión 21)</a:t>
+              <a:t> lo que he dicho?  (sesión 21)</a:t>
             </a:r>
           </a:p>
         </p:txBody>
@@ -6773,7 +6434,7 @@
                 </a:solidFill>
                 <a:latin typeface="Nunito Sans"/>
               </a:rPr>
-              <a:t>«¡Urgente! Mañana cortan el agua en todo Bilbao durante tres días. Reenvía a todos tus grupos.»</a:t>
+              <a:t>«No vas a creer lo que han encontrado en un instituto de Bilbao. El final te dejará sin palabras.»</a:t>
             </a:r>
           </a:p>
         </p:txBody>
@@ -6812,7 +6473,7 @@
                 </a:solidFill>
                 <a:latin typeface="Nunito Sans"/>
               </a:rPr>
-              <a:t>¿Qué te hace sospechar de este mensaje?</a:t>
+              <a:t>¿Qué sabes de verdad después de leer esa frase?</a:t>
             </a:r>
           </a:p>
         </p:txBody>
@@ -6916,7 +6577,7 @@
                 </a:solidFill>
                 <a:latin typeface="Fredoka"/>
               </a:rPr>
-              <a:t>Cómo se fabrica un bulo</a:t>
+              <a:t>Titulares y clickbait</a:t>
             </a:r>
           </a:p>
         </p:txBody>
@@ -6981,7 +6642,7 @@
                 </a:solidFill>
                 <a:latin typeface="Nunito Sans"/>
               </a:rPr>
-              <a:t>BLOQUE 1 · CÓMO SE FABRICA UN BULO</a:t>
+              <a:t>BLOQUE 1 · TITULARES Y CLICKBAIT</a:t>
             </a:r>
           </a:p>
         </p:txBody>
@@ -7020,7 +6681,7 @@
                 </a:solidFill>
                 <a:latin typeface="Fredoka"/>
               </a:rPr>
-              <a:t>Bulo</a:t>
+              <a:t>Titular</a:t>
             </a:r>
           </a:p>
         </p:txBody>
@@ -7102,7 +6763,7 @@
                 </a:solidFill>
                 <a:latin typeface="Nunito Sans"/>
               </a:rPr>
-              <a:t>Un bulo es una mentira que se hace pasar por noticia verdadera para engañar.</a:t>
+              <a:t>El titular es la frase grande que resume una noticia.</a:t>
             </a:r>
           </a:p>
         </p:txBody>
@@ -7150,7 +6811,7 @@
                 </a:solidFill>
                 <a:latin typeface="Nunito Sans"/>
               </a:rPr>
-              <a:t>No es un error: alguien lo </a:t>
+              <a:t>Debe resumir lo </a:t>
             </a:r>
             <a:r>
               <a:rPr sz="2800" b="1">
@@ -7159,7 +6820,7 @@
                 </a:solidFill>
                 <a:latin typeface="Nunito Sans"/>
               </a:rPr>
-              <a:t>inventa</a:t>
+              <a:t>importante</a:t>
             </a:r>
             <a:r>
               <a:rPr sz="2800" b="0">
@@ -7168,7 +6829,7 @@
                 </a:solidFill>
                 <a:latin typeface="Nunito Sans"/>
               </a:rPr>
-              <a:t> a propósito</a:t>
+              <a:t> de la noticia</a:t>
             </a:r>
           </a:p>
           <a:p>
@@ -7193,7 +6854,7 @@
                 </a:solidFill>
                 <a:latin typeface="Nunito Sans"/>
               </a:rPr>
-              <a:t>Busca dinero, fama, hacer daño o reírse de otros</a:t>
+              <a:t>Mucha gente solo lee el titular, no la noticia entera</a:t>
             </a:r>
           </a:p>
           <a:p>
@@ -7218,7 +6879,7 @@
                 </a:solidFill>
                 <a:latin typeface="Nunito Sans"/>
               </a:rPr>
-              <a:t>Se extiende por WhatsApp, TikTok y otras redes</a:t>
+              <a:t>Por eso un titular puede engañar sin mentir del todo</a:t>
             </a:r>
           </a:p>
         </p:txBody>
@@ -7283,7 +6944,7 @@
                 </a:solidFill>
                 <a:latin typeface="Nunito Sans"/>
               </a:rPr>
-              <a:t>BLOQUE 1 · CÓMO SE FABRICA UN BULO</a:t>
+              <a:t>BLOQUE 1 · TITULARES Y CLICKBAIT</a:t>
             </a:r>
           </a:p>
         </p:txBody>
@@ -7322,21 +6983,64 @@
                 </a:solidFill>
                 <a:latin typeface="Fredoka"/>
               </a:rPr>
-              <a:t>Ingredientes de un bulo</a:t>
-            </a:r>
-          </a:p>
-        </p:txBody>
-      </p:sp>
-      <p:sp>
-        <p:nvSpPr>
-          <p:cNvPr id="4" name="TextBox 3"/>
+              <a:t>Clickbait («cebo de clics»)</a:t>
+            </a:r>
+          </a:p>
+        </p:txBody>
+      </p:sp>
+      <p:sp>
+        <p:nvSpPr>
+          <p:cNvPr id="4" name="Rectangle 3"/>
+          <p:cNvSpPr/>
+          <p:nvPr/>
+        </p:nvSpPr>
+        <p:spPr>
+          <a:xfrm>
+            <a:off x="640000" y="1650000"/>
+            <a:ext cx="10912000" cy="1150000"/>
+          </a:xfrm>
+          <a:prstGeom prst="rect">
+            <a:avLst/>
+          </a:prstGeom>
+          <a:solidFill>
+            <a:srgbClr val="EAF0F7"/>
+          </a:solidFill>
+          <a:ln>
+            <a:noFill/>
+          </a:ln>
+        </p:spPr>
+        <p:style>
+          <a:lnRef idx="1">
+            <a:schemeClr val="accent1"/>
+          </a:lnRef>
+          <a:fillRef idx="3">
+            <a:schemeClr val="accent1"/>
+          </a:fillRef>
+          <a:effectRef idx="2">
+            <a:schemeClr val="accent1"/>
+          </a:effectRef>
+          <a:fontRef idx="minor">
+            <a:schemeClr val="lt1"/>
+          </a:fontRef>
+        </p:style>
+        <p:txBody>
+          <a:bodyPr rtlCol="0" anchor="ctr"/>
+          <a:lstStyle/>
+          <a:p>
+            <a:pPr algn="ctr"/>
+          </a:p>
+        </p:txBody>
+      </p:sp>
+      <p:sp>
+        <p:nvSpPr>
+          <p:cNvPr id="5" name="TextBox 4"/>
           <p:cNvSpPr txBox="1"/>
           <p:nvPr/>
         </p:nvSpPr>
         <p:spPr>
           <a:xfrm>
-            <a:off x="640000" y="1650000"/>
-            <a:ext cx="10912000" cy="4808000"/>
+            <a:off x="840000" y="1730000"/>
+            <a:ext cx="10512000" cy="1000000"/>
           </a:xfrm>
           <a:prstGeom prst="rect">
             <a:avLst/>
@@ -7344,6 +7048,45 @@
           <a:noFill/>
         </p:spPr>
         <p:txBody>
+          <a:bodyPr wrap="square" anchor="ctr">
+            <a:spAutoFit/>
+          </a:bodyPr>
+          <a:lstStyle/>
+          <a:p>
+            <a:pPr>
+              <a:spcAft>
+                <a:spcPts val="1260"/>
+              </a:spcAft>
+            </a:pPr>
+            <a:r>
+              <a:rPr sz="2800" b="1">
+                <a:solidFill>
+                  <a:srgbClr val="1F2A44"/>
+                </a:solidFill>
+                <a:latin typeface="Nunito Sans"/>
+              </a:rPr>
+              <a:t>Un titular que exagera o esconde información para que hagas clic.</a:t>
+            </a:r>
+          </a:p>
+        </p:txBody>
+      </p:sp>
+      <p:sp>
+        <p:nvSpPr>
+          <p:cNvPr id="6" name="TextBox 5"/>
+          <p:cNvSpPr txBox="1"/>
+          <p:nvPr/>
+        </p:nvSpPr>
+        <p:spPr>
+          <a:xfrm>
+            <a:off x="640000" y="3000000"/>
+            <a:ext cx="10912000" cy="3458000"/>
+          </a:xfrm>
+          <a:prstGeom prst="rect">
+            <a:avLst/>
+          </a:prstGeom>
+          <a:noFill/>
+        </p:spPr>
+        <p:txBody>
           <a:bodyPr wrap="square">
             <a:spAutoFit/>
           </a:bodyPr>
@@ -7364,13 +7107,54 @@
               <a:t>• </a:t>
             </a:r>
             <a:r>
+              <a:rPr sz="2800" b="0">
+                <a:solidFill>
+                  <a:srgbClr val="1F2A44"/>
+                </a:solidFill>
+                <a:latin typeface="Nunito Sans"/>
+              </a:rPr>
+              <a:t>Muchas webs ganan dinero con cada clic y cada anuncio</a:t>
+            </a:r>
+          </a:p>
+          <a:p>
+            <a:pPr>
+              <a:spcAft>
+                <a:spcPts val="1260"/>
+              </a:spcAft>
+            </a:pPr>
+            <a:r>
               <a:rPr sz="2800" b="1">
                 <a:solidFill>
+                  <a:srgbClr val="E8793A"/>
+                </a:solidFill>
+                <a:latin typeface="Nunito Sans"/>
+              </a:rPr>
+              <a:t>• </a:t>
+            </a:r>
+            <a:r>
+              <a:rPr sz="2800" b="0">
+                <a:solidFill>
                   <a:srgbClr val="1F2A44"/>
                 </a:solidFill>
                 <a:latin typeface="Nunito Sans"/>
               </a:rPr>
-              <a:t>Urgencia:</a:t>
+              <a:t>Promete mucho; la noticia cuenta poco</a:t>
+            </a:r>
+          </a:p>
+          <a:p>
+            <a:pPr>
+              <a:spcAft>
+                <a:spcPts val="1260"/>
+              </a:spcAft>
+            </a:pPr>
+            <a:r>
+              <a:rPr sz="2800" b="1">
+                <a:solidFill>
+                  <a:srgbClr val="E8793A"/>
+                </a:solidFill>
+                <a:latin typeface="Nunito Sans"/>
+              </a:rPr>
+              <a:t>• </a:t>
             </a:r>
             <a:r>
               <a:rPr sz="2800" b="0">
@@ -7379,134 +7163,7 @@
                 </a:solidFill>
                 <a:latin typeface="Nunito Sans"/>
               </a:rPr>
-              <a:t> «¡Última hora!», «¡Compártelo ya!»</a:t>
-            </a:r>
-          </a:p>
-          <a:p>
-            <a:pPr>
-              <a:spcAft>
-                <a:spcPts val="1260"/>
-              </a:spcAft>
-            </a:pPr>
-            <a:r>
-              <a:rPr sz="2800" b="1">
-                <a:solidFill>
-                  <a:srgbClr val="E8793A"/>
-                </a:solidFill>
-                <a:latin typeface="Nunito Sans"/>
-              </a:rPr>
-              <a:t>• </a:t>
-            </a:r>
-            <a:r>
-              <a:rPr sz="2800" b="1">
-                <a:solidFill>
-                  <a:srgbClr val="1F2A44"/>
-                </a:solidFill>
-                <a:latin typeface="Nunito Sans"/>
-              </a:rPr>
-              <a:t>Emoción fuerte:</a:t>
-            </a:r>
-            <a:r>
-              <a:rPr sz="2800" b="0">
-                <a:solidFill>
-                  <a:srgbClr val="1F2A44"/>
-                </a:solidFill>
-                <a:latin typeface="Nunito Sans"/>
-              </a:rPr>
-              <a:t> miedo, enfado o pena</a:t>
-            </a:r>
-          </a:p>
-          <a:p>
-            <a:pPr>
-              <a:spcAft>
-                <a:spcPts val="1260"/>
-              </a:spcAft>
-            </a:pPr>
-            <a:r>
-              <a:rPr sz="2800" b="1">
-                <a:solidFill>
-                  <a:srgbClr val="E8793A"/>
-                </a:solidFill>
-                <a:latin typeface="Nunito Sans"/>
-              </a:rPr>
-              <a:t>• </a:t>
-            </a:r>
-            <a:r>
-              <a:rPr sz="2800" b="1">
-                <a:solidFill>
-                  <a:srgbClr val="1F2A44"/>
-                </a:solidFill>
-                <a:latin typeface="Nunito Sans"/>
-              </a:rPr>
-              <a:t>Fuente vaga:</a:t>
-            </a:r>
-            <a:r>
-              <a:rPr sz="2800" b="0">
-                <a:solidFill>
-                  <a:srgbClr val="1F2A44"/>
-                </a:solidFill>
-                <a:latin typeface="Nunito Sans"/>
-              </a:rPr>
-              <a:t> «un amigo policía», «lo dice un médico»</a:t>
-            </a:r>
-          </a:p>
-          <a:p>
-            <a:pPr>
-              <a:spcAft>
-                <a:spcPts val="1260"/>
-              </a:spcAft>
-            </a:pPr>
-            <a:r>
-              <a:rPr sz="2800" b="1">
-                <a:solidFill>
-                  <a:srgbClr val="E8793A"/>
-                </a:solidFill>
-                <a:latin typeface="Nunito Sans"/>
-              </a:rPr>
-              <a:t>• </a:t>
-            </a:r>
-            <a:r>
-              <a:rPr sz="2800" b="1">
-                <a:solidFill>
-                  <a:srgbClr val="1F2A44"/>
-                </a:solidFill>
-                <a:latin typeface="Nunito Sans"/>
-              </a:rPr>
-              <a:t>Sin fecha ni lugar exacto</a:t>
-            </a:r>
-          </a:p>
-          <a:p>
-            <a:pPr>
-              <a:spcAft>
-                <a:spcPts val="1260"/>
-              </a:spcAft>
-            </a:pPr>
-            <a:r>
-              <a:rPr sz="2800" b="1">
-                <a:solidFill>
-                  <a:srgbClr val="E8793A"/>
-                </a:solidFill>
-                <a:latin typeface="Nunito Sans"/>
-              </a:rPr>
-              <a:t>• </a:t>
-            </a:r>
-            <a:r>
-              <a:rPr sz="2800" b="1">
-                <a:solidFill>
-                  <a:srgbClr val="1F2A44"/>
-                </a:solidFill>
-                <a:latin typeface="Nunito Sans"/>
-              </a:rPr>
-              <a:t>Imagen llamativa</a:t>
-            </a:r>
-            <a:r>
-              <a:rPr sz="2800" b="0">
-                <a:solidFill>
-                  <a:srgbClr val="1F2A44"/>
-                </a:solidFill>
-                <a:latin typeface="Nunito Sans"/>
-              </a:rPr>
-              <a:t>, a veces de otro sitio o de otro momento</a:t>
+              <a:t>Busca curiosidad, miedo o enfado</a:t>
             </a:r>
           </a:p>
         </p:txBody>
@@ -7520,6 +7177,342 @@
 </file>
 
 <file path=ppt/slides/slide8.xml><?xml version="1.0" encoding="utf-8"?>
+<p:sld xmlns:a="http://schemas.openxmlformats.org/drawingml/2006/main" xmlns:p="http://schemas.openxmlformats.org/presentationml/2006/main" xmlns:r="http://schemas.openxmlformats.org/officeDocument/2006/relationships">
+  <p:cSld>
+    <p:bg>
+      <p:bgPr>
+        <a:solidFill>
+          <a:srgbClr val="FBF7EF"/>
+        </a:solidFill>
+        <a:effectLst/>
+      </p:bgPr>
+    </p:bg>
+    <p:spTree>
+      <p:nvGrpSpPr>
+        <p:cNvPr id="1" name=""/>
+        <p:cNvGrpSpPr/>
+        <p:nvPr/>
+      </p:nvGrpSpPr>
+      <p:grpSpPr/>
+      <p:sp>
+        <p:nvSpPr>
+          <p:cNvPr id="2" name="TextBox 1"/>
+          <p:cNvSpPr txBox="1"/>
+          <p:nvPr/>
+        </p:nvSpPr>
+        <p:spPr>
+          <a:xfrm>
+            <a:off x="640000" y="380000"/>
+            <a:ext cx="10912000" cy="420000"/>
+          </a:xfrm>
+          <a:prstGeom prst="rect">
+            <a:avLst/>
+          </a:prstGeom>
+          <a:noFill/>
+        </p:spPr>
+        <p:txBody>
+          <a:bodyPr wrap="square">
+            <a:spAutoFit/>
+          </a:bodyPr>
+          <a:lstStyle/>
+          <a:p>
+            <a:pPr>
+              <a:spcAft>
+                <a:spcPts val="630"/>
+              </a:spcAft>
+            </a:pPr>
+            <a:r>
+              <a:rPr sz="1400" b="1">
+                <a:solidFill>
+                  <a:srgbClr val="E8793A"/>
+                </a:solidFill>
+                <a:latin typeface="Nunito Sans"/>
+              </a:rPr>
+              <a:t>BLOQUE 1 · TITULARES Y CLICKBAIT</a:t>
+            </a:r>
+          </a:p>
+        </p:txBody>
+      </p:sp>
+      <p:sp>
+        <p:nvSpPr>
+          <p:cNvPr id="3" name="TextBox 2"/>
+          <p:cNvSpPr txBox="1"/>
+          <p:nvPr/>
+        </p:nvSpPr>
+        <p:spPr>
+          <a:xfrm>
+            <a:off x="640000" y="760000"/>
+            <a:ext cx="10912000" cy="800000"/>
+          </a:xfrm>
+          <a:prstGeom prst="rect">
+            <a:avLst/>
+          </a:prstGeom>
+          <a:noFill/>
+        </p:spPr>
+        <p:txBody>
+          <a:bodyPr wrap="square">
+            <a:spAutoFit/>
+          </a:bodyPr>
+          <a:lstStyle/>
+          <a:p>
+            <a:pPr>
+              <a:spcAft>
+                <a:spcPts val="1710"/>
+              </a:spcAft>
+            </a:pPr>
+            <a:r>
+              <a:rPr sz="3800" b="1">
+                <a:solidFill>
+                  <a:srgbClr val="1F2A44"/>
+                </a:solidFill>
+                <a:latin typeface="Fredoka"/>
+              </a:rPr>
+              <a:t>Cómo reconocer un clickbait</a:t>
+            </a:r>
+          </a:p>
+        </p:txBody>
+      </p:sp>
+      <p:sp>
+        <p:nvSpPr>
+          <p:cNvPr id="4" name="TextBox 3"/>
+          <p:cNvSpPr txBox="1"/>
+          <p:nvPr/>
+        </p:nvSpPr>
+        <p:spPr>
+          <a:xfrm>
+            <a:off x="840000" y="1730000"/>
+            <a:ext cx="10512000" cy="1000000"/>
+          </a:xfrm>
+          <a:prstGeom prst="rect">
+            <a:avLst/>
+          </a:prstGeom>
+          <a:noFill/>
+        </p:spPr>
+        <p:txBody>
+          <a:bodyPr wrap="square" anchor="ctr">
+            <a:spAutoFit/>
+          </a:bodyPr>
+          <a:lstStyle/>
+          <a:p>
+            <a:pPr>
+              <a:spcAft>
+                <a:spcPts val="1080"/>
+              </a:spcAft>
+            </a:pPr>
+            <a:r>
+              <a:rPr sz="2400" b="0">
+                <a:solidFill>
+                  <a:srgbClr val="1F2A44"/>
+                </a:solidFill>
+                <a:latin typeface="Nunito Sans"/>
+              </a:rPr>
+              <a:t>Son pistas, no pruebas: lo que cuenta es si la noticia da lo que promete.</a:t>
+            </a:r>
+          </a:p>
+        </p:txBody>
+      </p:sp>
+      <p:sp>
+        <p:nvSpPr>
+          <p:cNvPr id="5" name="TextBox 4"/>
+          <p:cNvSpPr txBox="1"/>
+          <p:nvPr/>
+        </p:nvSpPr>
+        <p:spPr>
+          <a:xfrm>
+            <a:off x="640000" y="3000000"/>
+            <a:ext cx="10912000" cy="3458000"/>
+          </a:xfrm>
+          <a:prstGeom prst="rect">
+            <a:avLst/>
+          </a:prstGeom>
+          <a:noFill/>
+        </p:spPr>
+        <p:txBody>
+          <a:bodyPr wrap="square">
+            <a:spAutoFit/>
+          </a:bodyPr>
+          <a:lstStyle/>
+          <a:p>
+            <a:pPr>
+              <a:spcAft>
+                <a:spcPts val="1260"/>
+              </a:spcAft>
+            </a:pPr>
+            <a:r>
+              <a:rPr sz="2800" b="1">
+                <a:solidFill>
+                  <a:srgbClr val="E8793A"/>
+                </a:solidFill>
+                <a:latin typeface="Nunito Sans"/>
+              </a:rPr>
+              <a:t>• </a:t>
+            </a:r>
+            <a:r>
+              <a:rPr sz="2800" b="1">
+                <a:solidFill>
+                  <a:srgbClr val="1F2A44"/>
+                </a:solidFill>
+                <a:latin typeface="Nunito Sans"/>
+              </a:rPr>
+              <a:t>Esconde el dato:</a:t>
+            </a:r>
+            <a:r>
+              <a:rPr sz="2800" b="0">
+                <a:solidFill>
+                  <a:srgbClr val="1F2A44"/>
+                </a:solidFill>
+                <a:latin typeface="Nunito Sans"/>
+              </a:rPr>
+              <a:t> «No creerás lo que pasó»</a:t>
+            </a:r>
+          </a:p>
+          <a:p>
+            <a:pPr>
+              <a:spcAft>
+                <a:spcPts val="1260"/>
+              </a:spcAft>
+            </a:pPr>
+            <a:r>
+              <a:rPr sz="2800" b="1">
+                <a:solidFill>
+                  <a:srgbClr val="E8793A"/>
+                </a:solidFill>
+                <a:latin typeface="Nunito Sans"/>
+              </a:rPr>
+              <a:t>• </a:t>
+            </a:r>
+            <a:r>
+              <a:rPr sz="2800" b="1">
+                <a:solidFill>
+                  <a:srgbClr val="1F2A44"/>
+                </a:solidFill>
+                <a:latin typeface="Nunito Sans"/>
+              </a:rPr>
+              <a:t>Exagera:</a:t>
+            </a:r>
+            <a:r>
+              <a:rPr sz="2800" b="0">
+                <a:solidFill>
+                  <a:srgbClr val="1F2A44"/>
+                </a:solidFill>
+                <a:latin typeface="Nunito Sans"/>
+              </a:rPr>
+              <a:t> «increíble», «brutal», «impactante»</a:t>
+            </a:r>
+          </a:p>
+          <a:p>
+            <a:pPr>
+              <a:spcAft>
+                <a:spcPts val="1260"/>
+              </a:spcAft>
+            </a:pPr>
+            <a:r>
+              <a:rPr sz="2800" b="1">
+                <a:solidFill>
+                  <a:srgbClr val="E8793A"/>
+                </a:solidFill>
+                <a:latin typeface="Nunito Sans"/>
+              </a:rPr>
+              <a:t>• </a:t>
+            </a:r>
+            <a:r>
+              <a:rPr sz="2800" b="1">
+                <a:solidFill>
+                  <a:srgbClr val="1F2A44"/>
+                </a:solidFill>
+                <a:latin typeface="Nunito Sans"/>
+              </a:rPr>
+              <a:t>MAYÚSCULAS</a:t>
+            </a:r>
+            <a:r>
+              <a:rPr sz="2800" b="0">
+                <a:solidFill>
+                  <a:srgbClr val="1F2A44"/>
+                </a:solidFill>
+                <a:latin typeface="Nunito Sans"/>
+              </a:rPr>
+              <a:t> y muchos signos de exclamación</a:t>
+            </a:r>
+          </a:p>
+          <a:p>
+            <a:pPr>
+              <a:spcAft>
+                <a:spcPts val="1260"/>
+              </a:spcAft>
+            </a:pPr>
+            <a:r>
+              <a:rPr sz="2800" b="1">
+                <a:solidFill>
+                  <a:srgbClr val="E8793A"/>
+                </a:solidFill>
+                <a:latin typeface="Nunito Sans"/>
+              </a:rPr>
+              <a:t>• </a:t>
+            </a:r>
+            <a:r>
+              <a:rPr sz="2800" b="1">
+                <a:solidFill>
+                  <a:srgbClr val="1F2A44"/>
+                </a:solidFill>
+                <a:latin typeface="Nunito Sans"/>
+              </a:rPr>
+              <a:t>Promete un secreto:</a:t>
+            </a:r>
+            <a:r>
+              <a:rPr sz="2800" b="0">
+                <a:solidFill>
+                  <a:srgbClr val="1F2A44"/>
+                </a:solidFill>
+                <a:latin typeface="Nunito Sans"/>
+              </a:rPr>
+              <a:t> «lo que nadie te cuenta»</a:t>
+            </a:r>
+          </a:p>
+          <a:p>
+            <a:pPr>
+              <a:spcAft>
+                <a:spcPts val="1260"/>
+              </a:spcAft>
+            </a:pPr>
+            <a:r>
+              <a:rPr sz="2800" b="1">
+                <a:solidFill>
+                  <a:srgbClr val="E8793A"/>
+                </a:solidFill>
+                <a:latin typeface="Nunito Sans"/>
+              </a:rPr>
+              <a:t>• </a:t>
+            </a:r>
+            <a:r>
+              <a:rPr sz="2800" b="1">
+                <a:solidFill>
+                  <a:srgbClr val="1F2A44"/>
+                </a:solidFill>
+                <a:latin typeface="Nunito Sans"/>
+              </a:rPr>
+              <a:t>Hace una pregunta</a:t>
+            </a:r>
+            <a:r>
+              <a:rPr sz="2800" b="0">
+                <a:solidFill>
+                  <a:srgbClr val="1F2A44"/>
+                </a:solidFill>
+                <a:latin typeface="Nunito Sans"/>
+              </a:rPr>
+              <a:t> que la noticia contesta con un «no»</a:t>
+            </a:r>
+          </a:p>
+        </p:txBody>
+      </p:sp>
+    </p:spTree>
+  </p:cSld>
+  <p:clrMapOvr>
+    <a:masterClrMapping/>
+  </p:clrMapOvr>
+</p:sld>
+</file>
+
+<file path=ppt/slides/slide9.xml><?xml version="1.0" encoding="utf-8"?>
 <p:sld xmlns:a="http://schemas.openxmlformats.org/drawingml/2006/main" xmlns:p="http://schemas.openxmlformats.org/presentationml/2006/main" xmlns:r="http://schemas.openxmlformats.org/officeDocument/2006/relationships">
   <p:cSld>
     <p:bg>
@@ -7610,352 +7603,7 @@
                 </a:solidFill>
                 <a:latin typeface="Fredoka"/>
               </a:rPr>
-              <a:t>Por qué se comparten</a:t>
-            </a:r>
-          </a:p>
-        </p:txBody>
-      </p:sp>
-    </p:spTree>
-  </p:cSld>
-  <p:clrMapOvr>
-    <a:masterClrMapping/>
-  </p:clrMapOvr>
-</p:sld>
-</file>
-
-<file path=ppt/slides/slide9.xml><?xml version="1.0" encoding="utf-8"?>
-<p:sld xmlns:a="http://schemas.openxmlformats.org/drawingml/2006/main" xmlns:p="http://schemas.openxmlformats.org/presentationml/2006/main" xmlns:r="http://schemas.openxmlformats.org/officeDocument/2006/relationships">
-  <p:cSld>
-    <p:bg>
-      <p:bgPr>
-        <a:solidFill>
-          <a:srgbClr val="FBF7EF"/>
-        </a:solidFill>
-        <a:effectLst/>
-      </p:bgPr>
-    </p:bg>
-    <p:spTree>
-      <p:nvGrpSpPr>
-        <p:cNvPr id="1" name=""/>
-        <p:cNvGrpSpPr/>
-        <p:nvPr/>
-      </p:nvGrpSpPr>
-      <p:grpSpPr/>
-      <p:sp>
-        <p:nvSpPr>
-          <p:cNvPr id="2" name="TextBox 1"/>
-          <p:cNvSpPr txBox="1"/>
-          <p:nvPr/>
-        </p:nvSpPr>
-        <p:spPr>
-          <a:xfrm>
-            <a:off x="640000" y="380000"/>
-            <a:ext cx="10912000" cy="420000"/>
-          </a:xfrm>
-          <a:prstGeom prst="rect">
-            <a:avLst/>
-          </a:prstGeom>
-          <a:noFill/>
-        </p:spPr>
-        <p:txBody>
-          <a:bodyPr wrap="square">
-            <a:spAutoFit/>
-          </a:bodyPr>
-          <a:lstStyle/>
-          <a:p>
-            <a:pPr>
-              <a:spcAft>
-                <a:spcPts val="630"/>
-              </a:spcAft>
-            </a:pPr>
-            <a:r>
-              <a:rPr sz="1400" b="1">
-                <a:solidFill>
-                  <a:srgbClr val="E8793A"/>
-                </a:solidFill>
-                <a:latin typeface="Nunito Sans"/>
-              </a:rPr>
-              <a:t>BLOQUE 2 · POR QUÉ SE COMPARTEN</a:t>
-            </a:r>
-          </a:p>
-        </p:txBody>
-      </p:sp>
-      <p:sp>
-        <p:nvSpPr>
-          <p:cNvPr id="3" name="TextBox 2"/>
-          <p:cNvSpPr txBox="1"/>
-          <p:nvPr/>
-        </p:nvSpPr>
-        <p:spPr>
-          <a:xfrm>
-            <a:off x="640000" y="760000"/>
-            <a:ext cx="10912000" cy="800000"/>
-          </a:xfrm>
-          <a:prstGeom prst="rect">
-            <a:avLst/>
-          </a:prstGeom>
-          <a:noFill/>
-        </p:spPr>
-        <p:txBody>
-          <a:bodyPr wrap="square">
-            <a:spAutoFit/>
-          </a:bodyPr>
-          <a:lstStyle/>
-          <a:p>
-            <a:pPr>
-              <a:spcAft>
-                <a:spcPts val="1710"/>
-              </a:spcAft>
-            </a:pPr>
-            <a:r>
-              <a:rPr sz="3800" b="1">
-                <a:solidFill>
-                  <a:srgbClr val="1F2A44"/>
-                </a:solidFill>
-                <a:latin typeface="Fredoka"/>
-              </a:rPr>
-              <a:t>¿Por qué compartimos bulos?</a:t>
-            </a:r>
-          </a:p>
-        </p:txBody>
-      </p:sp>
-      <p:sp>
-        <p:nvSpPr>
-          <p:cNvPr id="4" name="TextBox 3"/>
-          <p:cNvSpPr txBox="1"/>
-          <p:nvPr/>
-        </p:nvSpPr>
-        <p:spPr>
-          <a:xfrm>
-            <a:off x="840000" y="1730000"/>
-            <a:ext cx="10512000" cy="1000000"/>
-          </a:xfrm>
-          <a:prstGeom prst="rect">
-            <a:avLst/>
-          </a:prstGeom>
-          <a:noFill/>
-        </p:spPr>
-        <p:txBody>
-          <a:bodyPr wrap="square" anchor="ctr">
-            <a:spAutoFit/>
-          </a:bodyPr>
-          <a:lstStyle/>
-          <a:p>
-            <a:pPr>
-              <a:spcAft>
-                <a:spcPts val="1080"/>
-              </a:spcAft>
-            </a:pPr>
-            <a:r>
-              <a:rPr sz="2400" b="0">
-                <a:solidFill>
-                  <a:srgbClr val="1F2A44"/>
-                </a:solidFill>
-                <a:latin typeface="Nunito Sans"/>
-              </a:rPr>
-              <a:t>Los bulos no se mueven solos: los movemos las personas.</a:t>
-            </a:r>
-          </a:p>
-        </p:txBody>
-      </p:sp>
-      <p:sp>
-        <p:nvSpPr>
-          <p:cNvPr id="5" name="TextBox 4"/>
-          <p:cNvSpPr txBox="1"/>
-          <p:nvPr/>
-        </p:nvSpPr>
-        <p:spPr>
-          <a:xfrm>
-            <a:off x="640000" y="3000000"/>
-            <a:ext cx="10912000" cy="3458000"/>
-          </a:xfrm>
-          <a:prstGeom prst="rect">
-            <a:avLst/>
-          </a:prstGeom>
-          <a:noFill/>
-        </p:spPr>
-        <p:txBody>
-          <a:bodyPr wrap="square">
-            <a:spAutoFit/>
-          </a:bodyPr>
-          <a:lstStyle/>
-          <a:p>
-            <a:pPr>
-              <a:spcAft>
-                <a:spcPts val="1260"/>
-              </a:spcAft>
-            </a:pPr>
-            <a:r>
-              <a:rPr sz="2800" b="1">
-                <a:solidFill>
-                  <a:srgbClr val="E8793A"/>
-                </a:solidFill>
-                <a:latin typeface="Nunito Sans"/>
-              </a:rPr>
-              <a:t>• </a:t>
-            </a:r>
-            <a:r>
-              <a:rPr sz="2800" b="0">
-                <a:solidFill>
-                  <a:srgbClr val="1F2A44"/>
-                </a:solidFill>
-                <a:latin typeface="Nunito Sans"/>
-              </a:rPr>
-              <a:t>Nos </a:t>
-            </a:r>
-            <a:r>
-              <a:rPr sz="2800" b="1">
-                <a:solidFill>
-                  <a:srgbClr val="1F2A44"/>
-                </a:solidFill>
-                <a:latin typeface="Nunito Sans"/>
-              </a:rPr>
-              <a:t>emocionan</a:t>
-            </a:r>
-            <a:r>
-              <a:rPr sz="2800" b="0">
-                <a:solidFill>
-                  <a:srgbClr val="1F2A44"/>
-                </a:solidFill>
-                <a:latin typeface="Nunito Sans"/>
-              </a:rPr>
-              <a:t> y queremos avisar a los demás</a:t>
-            </a:r>
-          </a:p>
-          <a:p>
-            <a:pPr>
-              <a:spcAft>
-                <a:spcPts val="1260"/>
-              </a:spcAft>
-            </a:pPr>
-            <a:r>
-              <a:rPr sz="2800" b="1">
-                <a:solidFill>
-                  <a:srgbClr val="E8793A"/>
-                </a:solidFill>
-                <a:latin typeface="Nunito Sans"/>
-              </a:rPr>
-              <a:t>• </a:t>
-            </a:r>
-            <a:r>
-              <a:rPr sz="2800" b="0">
-                <a:solidFill>
-                  <a:srgbClr val="1F2A44"/>
-                </a:solidFill>
-                <a:latin typeface="Nunito Sans"/>
-              </a:rPr>
-              <a:t>Lo manda alguien de </a:t>
-            </a:r>
-            <a:r>
-              <a:rPr sz="2800" b="1">
-                <a:solidFill>
-                  <a:srgbClr val="1F2A44"/>
-                </a:solidFill>
-                <a:latin typeface="Nunito Sans"/>
-              </a:rPr>
-              <a:t>confianza</a:t>
-            </a:r>
-          </a:p>
-          <a:p>
-            <a:pPr>
-              <a:spcAft>
-                <a:spcPts val="1260"/>
-              </a:spcAft>
-            </a:pPr>
-            <a:r>
-              <a:rPr sz="2800" b="1">
-                <a:solidFill>
-                  <a:srgbClr val="E8793A"/>
-                </a:solidFill>
-                <a:latin typeface="Nunito Sans"/>
-              </a:rPr>
-              <a:t>• </a:t>
-            </a:r>
-            <a:r>
-              <a:rPr sz="2800" b="0">
-                <a:solidFill>
-                  <a:srgbClr val="1F2A44"/>
-                </a:solidFill>
-                <a:latin typeface="Nunito Sans"/>
-              </a:rPr>
-              <a:t>Encaja con lo que </a:t>
-            </a:r>
-            <a:r>
-              <a:rPr sz="2800" b="1">
-                <a:solidFill>
-                  <a:srgbClr val="1F2A44"/>
-                </a:solidFill>
-                <a:latin typeface="Nunito Sans"/>
-              </a:rPr>
-              <a:t>ya pensábamos</a:t>
-            </a:r>
-          </a:p>
-          <a:p>
-            <a:pPr>
-              <a:spcAft>
-                <a:spcPts val="1260"/>
-              </a:spcAft>
-            </a:pPr>
-            <a:r>
-              <a:rPr sz="2800" b="1">
-                <a:solidFill>
-                  <a:srgbClr val="E8793A"/>
-                </a:solidFill>
-                <a:latin typeface="Nunito Sans"/>
-              </a:rPr>
-              <a:t>• </a:t>
-            </a:r>
-            <a:r>
-              <a:rPr sz="2800" b="0">
-                <a:solidFill>
-                  <a:srgbClr val="1F2A44"/>
-                </a:solidFill>
-                <a:latin typeface="Nunito Sans"/>
-              </a:rPr>
-              <a:t>Compartir es </a:t>
-            </a:r>
-            <a:r>
-              <a:rPr sz="2800" b="1">
-                <a:solidFill>
-                  <a:srgbClr val="1F2A44"/>
-                </a:solidFill>
-                <a:latin typeface="Nunito Sans"/>
-              </a:rPr>
-              <a:t>muy fácil</a:t>
-            </a:r>
-            <a:r>
-              <a:rPr sz="2800" b="0">
-                <a:solidFill>
-                  <a:srgbClr val="1F2A44"/>
-                </a:solidFill>
-                <a:latin typeface="Nunito Sans"/>
-              </a:rPr>
-              <a:t>: un solo clic</a:t>
-            </a:r>
-          </a:p>
-          <a:p>
-            <a:pPr>
-              <a:spcAft>
-                <a:spcPts val="1260"/>
-              </a:spcAft>
-            </a:pPr>
-            <a:r>
-              <a:rPr sz="2800" b="1">
-                <a:solidFill>
-                  <a:srgbClr val="E8793A"/>
-                </a:solidFill>
-                <a:latin typeface="Nunito Sans"/>
-              </a:rPr>
-              <a:t>• </a:t>
-            </a:r>
-            <a:r>
-              <a:rPr sz="2800" b="0">
-                <a:solidFill>
-                  <a:srgbClr val="1F2A44"/>
-                </a:solidFill>
-                <a:latin typeface="Nunito Sans"/>
-              </a:rPr>
-              <a:t>En Twitter, las noticias falsas se compartían más y más rápido (MIT, 2018)</a:t>
+              <a:t>Casos resueltos</a:t>
             </a:r>
           </a:p>
         </p:txBody>
